--- a/theory/figures.pptx
+++ b/theory/figures.pptx
@@ -5,23 +5,24 @@
     <p:sldMasterId id="2147483660" r:id="rId1"/>
   </p:sldMasterIdLst>
   <p:notesMasterIdLst>
-    <p:notesMasterId r:id="rId16"/>
+    <p:notesMasterId r:id="rId17"/>
   </p:notesMasterIdLst>
   <p:sldIdLst>
     <p:sldId id="416" r:id="rId2"/>
-    <p:sldId id="307" r:id="rId3"/>
-    <p:sldId id="422" r:id="rId4"/>
-    <p:sldId id="256" r:id="rId5"/>
-    <p:sldId id="419" r:id="rId6"/>
-    <p:sldId id="420" r:id="rId7"/>
-    <p:sldId id="418" r:id="rId8"/>
-    <p:sldId id="257" r:id="rId9"/>
-    <p:sldId id="258" r:id="rId10"/>
-    <p:sldId id="421" r:id="rId11"/>
-    <p:sldId id="308" r:id="rId12"/>
-    <p:sldId id="417" r:id="rId13"/>
-    <p:sldId id="415" r:id="rId14"/>
-    <p:sldId id="414" r:id="rId15"/>
+    <p:sldId id="423" r:id="rId3"/>
+    <p:sldId id="307" r:id="rId4"/>
+    <p:sldId id="422" r:id="rId5"/>
+    <p:sldId id="256" r:id="rId6"/>
+    <p:sldId id="419" r:id="rId7"/>
+    <p:sldId id="420" r:id="rId8"/>
+    <p:sldId id="418" r:id="rId9"/>
+    <p:sldId id="257" r:id="rId10"/>
+    <p:sldId id="258" r:id="rId11"/>
+    <p:sldId id="421" r:id="rId12"/>
+    <p:sldId id="308" r:id="rId13"/>
+    <p:sldId id="417" r:id="rId14"/>
+    <p:sldId id="415" r:id="rId15"/>
+    <p:sldId id="414" r:id="rId16"/>
   </p:sldIdLst>
   <p:sldSz cx="18288000" cy="13716000"/>
   <p:notesSz cx="6858000" cy="9144000"/>
@@ -210,7 +211,7 @@
           <a:p>
             <a:fld id="{B6196174-8C34-0446-B935-D6E0231AA97B}" type="datetimeFigureOut">
               <a:rPr lang="en-US" smtClean="0"/>
-              <a:t>10/21/25</a:t>
+              <a:t>1/25/26</a:t>
             </a:fld>
             <a:endParaRPr lang="en-US"/>
           </a:p>
@@ -504,6 +505,90 @@
             <p:ph type="sldImg"/>
           </p:nvPr>
         </p:nvSpPr>
+        <p:spPr/>
+      </p:sp>
+      <p:sp>
+        <p:nvSpPr>
+          <p:cNvPr id="3" name="Notes Placeholder 2"/>
+          <p:cNvSpPr>
+            <a:spLocks noGrp="1"/>
+          </p:cNvSpPr>
+          <p:nvPr>
+            <p:ph type="body" idx="1"/>
+          </p:nvPr>
+        </p:nvSpPr>
+        <p:spPr/>
+        <p:txBody>
+          <a:bodyPr/>
+          <a:lstStyle/>
+          <a:p>
+            <a:endParaRPr lang="en-US" dirty="0"/>
+          </a:p>
+        </p:txBody>
+      </p:sp>
+      <p:sp>
+        <p:nvSpPr>
+          <p:cNvPr id="4" name="Slide Number Placeholder 3"/>
+          <p:cNvSpPr>
+            <a:spLocks noGrp="1"/>
+          </p:cNvSpPr>
+          <p:nvPr>
+            <p:ph type="sldNum" sz="quarter" idx="5"/>
+          </p:nvPr>
+        </p:nvSpPr>
+        <p:spPr/>
+        <p:txBody>
+          <a:bodyPr/>
+          <a:lstStyle/>
+          <a:p>
+            <a:fld id="{7C3888FE-2005-2344-9D9B-8C1C6FE72B90}" type="slidenum">
+              <a:rPr lang="en-US" smtClean="0"/>
+              <a:t>2</a:t>
+            </a:fld>
+            <a:endParaRPr lang="en-US"/>
+          </a:p>
+        </p:txBody>
+      </p:sp>
+    </p:spTree>
+    <p:extLst>
+      <p:ext uri="{BB962C8B-B14F-4D97-AF65-F5344CB8AC3E}">
+        <p14:creationId xmlns:p14="http://schemas.microsoft.com/office/powerpoint/2010/main" val="1629129200"/>
+      </p:ext>
+    </p:extLst>
+  </p:cSld>
+  <p:clrMapOvr>
+    <a:masterClrMapping/>
+  </p:clrMapOvr>
+</p:notes>
+</file>
+
+<file path=ppt/notesSlides/notesSlide2.xml><?xml version="1.0" encoding="utf-8"?>
+<p:notes xmlns:a="http://schemas.openxmlformats.org/drawingml/2006/main" xmlns:r="http://schemas.openxmlformats.org/officeDocument/2006/relationships" xmlns:p="http://schemas.openxmlformats.org/presentationml/2006/main">
+  <p:cSld>
+    <p:spTree>
+      <p:nvGrpSpPr>
+        <p:cNvPr id="1" name=""/>
+        <p:cNvGrpSpPr/>
+        <p:nvPr/>
+      </p:nvGrpSpPr>
+      <p:grpSpPr>
+        <a:xfrm>
+          <a:off x="0" y="0"/>
+          <a:ext cx="0" cy="0"/>
+          <a:chOff x="0" y="0"/>
+          <a:chExt cx="0" cy="0"/>
+        </a:xfrm>
+      </p:grpSpPr>
+      <p:sp>
+        <p:nvSpPr>
+          <p:cNvPr id="2" name="Slide Image Placeholder 1"/>
+          <p:cNvSpPr>
+            <a:spLocks noGrp="1" noRot="1" noChangeAspect="1"/>
+          </p:cNvSpPr>
+          <p:nvPr>
+            <p:ph type="sldImg"/>
+          </p:nvPr>
+        </p:nvSpPr>
         <p:spPr>
           <a:xfrm>
             <a:off x="1371600" y="1143000"/>
@@ -547,7 +632,7 @@
           <a:p>
             <a:fld id="{8EC25762-D872-2B40-A6A0-ED5E5E04D859}" type="slidenum">
               <a:rPr lang="en-US" smtClean="0"/>
-              <a:t>2</a:t>
+              <a:t>3</a:t>
             </a:fld>
             <a:endParaRPr lang="en-US"/>
           </a:p>
@@ -557,90 +642,6 @@
     <p:extLst>
       <p:ext uri="{BB962C8B-B14F-4D97-AF65-F5344CB8AC3E}">
         <p14:creationId xmlns:p14="http://schemas.microsoft.com/office/powerpoint/2010/main" val="3721226834"/>
-      </p:ext>
-    </p:extLst>
-  </p:cSld>
-  <p:clrMapOvr>
-    <a:masterClrMapping/>
-  </p:clrMapOvr>
-</p:notes>
-</file>
-
-<file path=ppt/notesSlides/notesSlide2.xml><?xml version="1.0" encoding="utf-8"?>
-<p:notes xmlns:a="http://schemas.openxmlformats.org/drawingml/2006/main" xmlns:r="http://schemas.openxmlformats.org/officeDocument/2006/relationships" xmlns:p="http://schemas.openxmlformats.org/presentationml/2006/main">
-  <p:cSld>
-    <p:spTree>
-      <p:nvGrpSpPr>
-        <p:cNvPr id="1" name=""/>
-        <p:cNvGrpSpPr/>
-        <p:nvPr/>
-      </p:nvGrpSpPr>
-      <p:grpSpPr>
-        <a:xfrm>
-          <a:off x="0" y="0"/>
-          <a:ext cx="0" cy="0"/>
-          <a:chOff x="0" y="0"/>
-          <a:chExt cx="0" cy="0"/>
-        </a:xfrm>
-      </p:grpSpPr>
-      <p:sp>
-        <p:nvSpPr>
-          <p:cNvPr id="2" name="Slide Image Placeholder 1"/>
-          <p:cNvSpPr>
-            <a:spLocks noGrp="1" noRot="1" noChangeAspect="1"/>
-          </p:cNvSpPr>
-          <p:nvPr>
-            <p:ph type="sldImg"/>
-          </p:nvPr>
-        </p:nvSpPr>
-        <p:spPr/>
-      </p:sp>
-      <p:sp>
-        <p:nvSpPr>
-          <p:cNvPr id="3" name="Notes Placeholder 2"/>
-          <p:cNvSpPr>
-            <a:spLocks noGrp="1"/>
-          </p:cNvSpPr>
-          <p:nvPr>
-            <p:ph type="body" idx="1"/>
-          </p:nvPr>
-        </p:nvSpPr>
-        <p:spPr/>
-        <p:txBody>
-          <a:bodyPr/>
-          <a:lstStyle/>
-          <a:p>
-            <a:endParaRPr lang="en-US" dirty="0"/>
-          </a:p>
-        </p:txBody>
-      </p:sp>
-      <p:sp>
-        <p:nvSpPr>
-          <p:cNvPr id="4" name="Slide Number Placeholder 3"/>
-          <p:cNvSpPr>
-            <a:spLocks noGrp="1"/>
-          </p:cNvSpPr>
-          <p:nvPr>
-            <p:ph type="sldNum" sz="quarter" idx="5"/>
-          </p:nvPr>
-        </p:nvSpPr>
-        <p:spPr/>
-        <p:txBody>
-          <a:bodyPr/>
-          <a:lstStyle/>
-          <a:p>
-            <a:fld id="{7C3888FE-2005-2344-9D9B-8C1C6FE72B90}" type="slidenum">
-              <a:rPr lang="en-US" smtClean="0"/>
-              <a:t>3</a:t>
-            </a:fld>
-            <a:endParaRPr lang="en-US"/>
-          </a:p>
-        </p:txBody>
-      </p:sp>
-    </p:spTree>
-    <p:extLst>
-      <p:ext uri="{BB962C8B-B14F-4D97-AF65-F5344CB8AC3E}">
-        <p14:creationId xmlns:p14="http://schemas.microsoft.com/office/powerpoint/2010/main" val="220120467"/>
       </p:ext>
     </p:extLst>
   </p:cSld>
@@ -715,7 +716,91 @@
           <a:p>
             <a:fld id="{7C3888FE-2005-2344-9D9B-8C1C6FE72B90}" type="slidenum">
               <a:rPr lang="en-US" smtClean="0"/>
-              <a:t>5</a:t>
+              <a:t>4</a:t>
+            </a:fld>
+            <a:endParaRPr lang="en-US"/>
+          </a:p>
+        </p:txBody>
+      </p:sp>
+    </p:spTree>
+    <p:extLst>
+      <p:ext uri="{BB962C8B-B14F-4D97-AF65-F5344CB8AC3E}">
+        <p14:creationId xmlns:p14="http://schemas.microsoft.com/office/powerpoint/2010/main" val="220120467"/>
+      </p:ext>
+    </p:extLst>
+  </p:cSld>
+  <p:clrMapOvr>
+    <a:masterClrMapping/>
+  </p:clrMapOvr>
+</p:notes>
+</file>
+
+<file path=ppt/notesSlides/notesSlide4.xml><?xml version="1.0" encoding="utf-8"?>
+<p:notes xmlns:a="http://schemas.openxmlformats.org/drawingml/2006/main" xmlns:r="http://schemas.openxmlformats.org/officeDocument/2006/relationships" xmlns:p="http://schemas.openxmlformats.org/presentationml/2006/main">
+  <p:cSld>
+    <p:spTree>
+      <p:nvGrpSpPr>
+        <p:cNvPr id="1" name=""/>
+        <p:cNvGrpSpPr/>
+        <p:nvPr/>
+      </p:nvGrpSpPr>
+      <p:grpSpPr>
+        <a:xfrm>
+          <a:off x="0" y="0"/>
+          <a:ext cx="0" cy="0"/>
+          <a:chOff x="0" y="0"/>
+          <a:chExt cx="0" cy="0"/>
+        </a:xfrm>
+      </p:grpSpPr>
+      <p:sp>
+        <p:nvSpPr>
+          <p:cNvPr id="2" name="Slide Image Placeholder 1"/>
+          <p:cNvSpPr>
+            <a:spLocks noGrp="1" noRot="1" noChangeAspect="1"/>
+          </p:cNvSpPr>
+          <p:nvPr>
+            <p:ph type="sldImg"/>
+          </p:nvPr>
+        </p:nvSpPr>
+        <p:spPr/>
+      </p:sp>
+      <p:sp>
+        <p:nvSpPr>
+          <p:cNvPr id="3" name="Notes Placeholder 2"/>
+          <p:cNvSpPr>
+            <a:spLocks noGrp="1"/>
+          </p:cNvSpPr>
+          <p:nvPr>
+            <p:ph type="body" idx="1"/>
+          </p:nvPr>
+        </p:nvSpPr>
+        <p:spPr/>
+        <p:txBody>
+          <a:bodyPr/>
+          <a:lstStyle/>
+          <a:p>
+            <a:endParaRPr lang="en-US" dirty="0"/>
+          </a:p>
+        </p:txBody>
+      </p:sp>
+      <p:sp>
+        <p:nvSpPr>
+          <p:cNvPr id="4" name="Slide Number Placeholder 3"/>
+          <p:cNvSpPr>
+            <a:spLocks noGrp="1"/>
+          </p:cNvSpPr>
+          <p:nvPr>
+            <p:ph type="sldNum" sz="quarter" idx="5"/>
+          </p:nvPr>
+        </p:nvSpPr>
+        <p:spPr/>
+        <p:txBody>
+          <a:bodyPr/>
+          <a:lstStyle/>
+          <a:p>
+            <a:fld id="{7C3888FE-2005-2344-9D9B-8C1C6FE72B90}" type="slidenum">
+              <a:rPr lang="en-US" smtClean="0"/>
+              <a:t>6</a:t>
             </a:fld>
             <a:endParaRPr lang="en-US"/>
           </a:p>
@@ -734,7 +819,7 @@
 </p:notes>
 </file>
 
-<file path=ppt/notesSlides/notesSlide4.xml><?xml version="1.0" encoding="utf-8"?>
+<file path=ppt/notesSlides/notesSlide5.xml><?xml version="1.0" encoding="utf-8"?>
 <p:notes xmlns:a="http://schemas.openxmlformats.org/drawingml/2006/main" xmlns:r="http://schemas.openxmlformats.org/officeDocument/2006/relationships" xmlns:p="http://schemas.openxmlformats.org/presentationml/2006/main">
   <p:cSld>
     <p:spTree>
@@ -804,7 +889,7 @@
           <a:p>
             <a:fld id="{0CDA47E4-8FA8-C148-9A76-B9DC4B7DCF4D}" type="slidenum">
               <a:rPr lang="en-US" smtClean="0"/>
-              <a:t>14</a:t>
+              <a:t>15</a:t>
             </a:fld>
             <a:endParaRPr lang="en-US"/>
           </a:p>
@@ -954,7 +1039,7 @@
           <a:p>
             <a:fld id="{058C4696-067A-144C-B211-61593130B761}" type="datetimeFigureOut">
               <a:rPr lang="en-US" smtClean="0"/>
-              <a:t>10/21/25</a:t>
+              <a:t>1/25/26</a:t>
             </a:fld>
             <a:endParaRPr lang="en-US"/>
           </a:p>
@@ -1124,7 +1209,7 @@
           <a:p>
             <a:fld id="{058C4696-067A-144C-B211-61593130B761}" type="datetimeFigureOut">
               <a:rPr lang="en-US" smtClean="0"/>
-              <a:t>10/21/25</a:t>
+              <a:t>1/25/26</a:t>
             </a:fld>
             <a:endParaRPr lang="en-US"/>
           </a:p>
@@ -1304,7 +1389,7 @@
           <a:p>
             <a:fld id="{058C4696-067A-144C-B211-61593130B761}" type="datetimeFigureOut">
               <a:rPr lang="en-US" smtClean="0"/>
-              <a:t>10/21/25</a:t>
+              <a:t>1/25/26</a:t>
             </a:fld>
             <a:endParaRPr lang="en-US"/>
           </a:p>
@@ -1474,7 +1559,7 @@
           <a:p>
             <a:fld id="{058C4696-067A-144C-B211-61593130B761}" type="datetimeFigureOut">
               <a:rPr lang="en-US" smtClean="0"/>
-              <a:t>10/21/25</a:t>
+              <a:t>1/25/26</a:t>
             </a:fld>
             <a:endParaRPr lang="en-US"/>
           </a:p>
@@ -1720,7 +1805,7 @@
           <a:p>
             <a:fld id="{058C4696-067A-144C-B211-61593130B761}" type="datetimeFigureOut">
               <a:rPr lang="en-US" smtClean="0"/>
-              <a:t>10/21/25</a:t>
+              <a:t>1/25/26</a:t>
             </a:fld>
             <a:endParaRPr lang="en-US"/>
           </a:p>
@@ -1952,7 +2037,7 @@
           <a:p>
             <a:fld id="{058C4696-067A-144C-B211-61593130B761}" type="datetimeFigureOut">
               <a:rPr lang="en-US" smtClean="0"/>
-              <a:t>10/21/25</a:t>
+              <a:t>1/25/26</a:t>
             </a:fld>
             <a:endParaRPr lang="en-US"/>
           </a:p>
@@ -2319,7 +2404,7 @@
           <a:p>
             <a:fld id="{058C4696-067A-144C-B211-61593130B761}" type="datetimeFigureOut">
               <a:rPr lang="en-US" smtClean="0"/>
-              <a:t>10/21/25</a:t>
+              <a:t>1/25/26</a:t>
             </a:fld>
             <a:endParaRPr lang="en-US"/>
           </a:p>
@@ -2437,7 +2522,7 @@
           <a:p>
             <a:fld id="{058C4696-067A-144C-B211-61593130B761}" type="datetimeFigureOut">
               <a:rPr lang="en-US" smtClean="0"/>
-              <a:t>10/21/25</a:t>
+              <a:t>1/25/26</a:t>
             </a:fld>
             <a:endParaRPr lang="en-US"/>
           </a:p>
@@ -2532,7 +2617,7 @@
           <a:p>
             <a:fld id="{058C4696-067A-144C-B211-61593130B761}" type="datetimeFigureOut">
               <a:rPr lang="en-US" smtClean="0"/>
-              <a:t>10/21/25</a:t>
+              <a:t>1/25/26</a:t>
             </a:fld>
             <a:endParaRPr lang="en-US"/>
           </a:p>
@@ -2809,7 +2894,7 @@
           <a:p>
             <a:fld id="{058C4696-067A-144C-B211-61593130B761}" type="datetimeFigureOut">
               <a:rPr lang="en-US" smtClean="0"/>
-              <a:t>10/21/25</a:t>
+              <a:t>1/25/26</a:t>
             </a:fld>
             <a:endParaRPr lang="en-US"/>
           </a:p>
@@ -3066,7 +3151,7 @@
           <a:p>
             <a:fld id="{058C4696-067A-144C-B211-61593130B761}" type="datetimeFigureOut">
               <a:rPr lang="en-US" smtClean="0"/>
-              <a:t>10/21/25</a:t>
+              <a:t>1/25/26</a:t>
             </a:fld>
             <a:endParaRPr lang="en-US"/>
           </a:p>
@@ -3279,7 +3364,7 @@
           <a:p>
             <a:fld id="{058C4696-067A-144C-B211-61593130B761}" type="datetimeFigureOut">
               <a:rPr lang="en-US" smtClean="0"/>
-              <a:t>10/21/25</a:t>
+              <a:t>1/25/26</a:t>
             </a:fld>
             <a:endParaRPr lang="en-US"/>
           </a:p>
@@ -8910,6 +8995,1963 @@
       </p:grpSpPr>
       <p:pic>
         <p:nvPicPr>
+          <p:cNvPr id="46" name="Picture 45" descr="A picture containing line, diagram, design&#10;&#10;Description automatically generated">
+            <a:extLst>
+              <a:ext uri="{FF2B5EF4-FFF2-40B4-BE49-F238E27FC236}">
+                <a16:creationId xmlns:a16="http://schemas.microsoft.com/office/drawing/2014/main" id="{FBB4A572-62A4-9FD2-35E2-857EF3D73B4B}"/>
+              </a:ext>
+            </a:extLst>
+          </p:cNvPr>
+          <p:cNvPicPr>
+            <a:picLocks noChangeAspect="1"/>
+          </p:cNvPicPr>
+          <p:nvPr/>
+        </p:nvPicPr>
+        <p:blipFill>
+          <a:blip r:embed="rId2">
+            <a:extLst>
+              <a:ext uri="{28A0092B-C50C-407E-A947-70E740481C1C}">
+                <a14:useLocalDpi xmlns:a14="http://schemas.microsoft.com/office/drawing/2010/main" val="0"/>
+              </a:ext>
+            </a:extLst>
+          </a:blip>
+          <a:stretch>
+            <a:fillRect/>
+          </a:stretch>
+        </p:blipFill>
+        <p:spPr>
+          <a:xfrm>
+            <a:off x="3062122" y="3903551"/>
+            <a:ext cx="4339242" cy="3749105"/>
+          </a:xfrm>
+          <a:prstGeom prst="rect">
+            <a:avLst/>
+          </a:prstGeom>
+        </p:spPr>
+      </p:pic>
+      <p:sp>
+        <p:nvSpPr>
+          <p:cNvPr id="2" name="Rectangle 1">
+            <a:extLst>
+              <a:ext uri="{FF2B5EF4-FFF2-40B4-BE49-F238E27FC236}">
+                <a16:creationId xmlns:a16="http://schemas.microsoft.com/office/drawing/2014/main" id="{772E8914-CDF0-FA18-C916-5ACA7E1C0274}"/>
+              </a:ext>
+            </a:extLst>
+          </p:cNvPr>
+          <p:cNvSpPr/>
+          <p:nvPr/>
+        </p:nvSpPr>
+        <p:spPr>
+          <a:xfrm>
+            <a:off x="12952289" y="5464400"/>
+            <a:ext cx="270276" cy="182881"/>
+          </a:xfrm>
+          <a:prstGeom prst="rect">
+            <a:avLst/>
+          </a:prstGeom>
+          <a:solidFill>
+            <a:schemeClr val="bg1"/>
+          </a:solidFill>
+          <a:ln>
+            <a:solidFill>
+              <a:schemeClr val="bg1"/>
+            </a:solidFill>
+          </a:ln>
+        </p:spPr>
+        <p:style>
+          <a:lnRef idx="2">
+            <a:schemeClr val="accent1">
+              <a:shade val="15000"/>
+            </a:schemeClr>
+          </a:lnRef>
+          <a:fillRef idx="1">
+            <a:schemeClr val="accent1"/>
+          </a:fillRef>
+          <a:effectRef idx="0">
+            <a:schemeClr val="accent1"/>
+          </a:effectRef>
+          <a:fontRef idx="minor">
+            <a:schemeClr val="lt1"/>
+          </a:fontRef>
+        </p:style>
+        <p:txBody>
+          <a:bodyPr rtlCol="0" anchor="ctr"/>
+          <a:lstStyle/>
+          <a:p>
+            <a:pPr algn="ctr"/>
+            <a:endParaRPr lang="en-US"/>
+          </a:p>
+        </p:txBody>
+      </p:sp>
+      <p:sp>
+        <p:nvSpPr>
+          <p:cNvPr id="3" name="Rectangle 2">
+            <a:extLst>
+              <a:ext uri="{FF2B5EF4-FFF2-40B4-BE49-F238E27FC236}">
+                <a16:creationId xmlns:a16="http://schemas.microsoft.com/office/drawing/2014/main" id="{778238F8-C915-F5DD-EF24-9CA0A3422FBB}"/>
+              </a:ext>
+            </a:extLst>
+          </p:cNvPr>
+          <p:cNvSpPr/>
+          <p:nvPr/>
+        </p:nvSpPr>
+        <p:spPr>
+          <a:xfrm>
+            <a:off x="5345538" y="4373510"/>
+            <a:ext cx="270276" cy="182881"/>
+          </a:xfrm>
+          <a:prstGeom prst="rect">
+            <a:avLst/>
+          </a:prstGeom>
+          <a:solidFill>
+            <a:schemeClr val="bg1"/>
+          </a:solidFill>
+          <a:ln>
+            <a:solidFill>
+              <a:schemeClr val="bg1"/>
+            </a:solidFill>
+          </a:ln>
+        </p:spPr>
+        <p:style>
+          <a:lnRef idx="2">
+            <a:schemeClr val="accent1">
+              <a:shade val="15000"/>
+            </a:schemeClr>
+          </a:lnRef>
+          <a:fillRef idx="1">
+            <a:schemeClr val="accent1"/>
+          </a:fillRef>
+          <a:effectRef idx="0">
+            <a:schemeClr val="accent1"/>
+          </a:effectRef>
+          <a:fontRef idx="minor">
+            <a:schemeClr val="lt1"/>
+          </a:fontRef>
+        </p:style>
+        <p:txBody>
+          <a:bodyPr rtlCol="0" anchor="ctr"/>
+          <a:lstStyle/>
+          <a:p>
+            <a:pPr algn="ctr"/>
+            <a:endParaRPr lang="en-US"/>
+          </a:p>
+        </p:txBody>
+      </p:sp>
+      <p:grpSp>
+        <p:nvGrpSpPr>
+          <p:cNvPr id="14" name="Group 13">
+            <a:extLst>
+              <a:ext uri="{FF2B5EF4-FFF2-40B4-BE49-F238E27FC236}">
+                <a16:creationId xmlns:a16="http://schemas.microsoft.com/office/drawing/2014/main" id="{F4F98E04-8210-9705-8245-D01DE01C5F5C}"/>
+              </a:ext>
+            </a:extLst>
+          </p:cNvPr>
+          <p:cNvGrpSpPr/>
+          <p:nvPr/>
+        </p:nvGrpSpPr>
+        <p:grpSpPr>
+          <a:xfrm>
+            <a:off x="10061651" y="4875629"/>
+            <a:ext cx="4661894" cy="3964741"/>
+            <a:chOff x="10663139" y="4875629"/>
+            <a:chExt cx="4661894" cy="3964741"/>
+          </a:xfrm>
+        </p:grpSpPr>
+        <p:pic>
+          <p:nvPicPr>
+            <p:cNvPr id="8" name="Picture 7">
+              <a:extLst>
+                <a:ext uri="{FF2B5EF4-FFF2-40B4-BE49-F238E27FC236}">
+                  <a16:creationId xmlns:a16="http://schemas.microsoft.com/office/drawing/2014/main" id="{F59AB5FF-891B-4E21-EA12-F94BD59CF9EB}"/>
+                </a:ext>
+              </a:extLst>
+            </p:cNvPr>
+            <p:cNvPicPr>
+              <a:picLocks noChangeAspect="1"/>
+            </p:cNvPicPr>
+            <p:nvPr/>
+          </p:nvPicPr>
+          <p:blipFill>
+            <a:blip r:embed="rId3"/>
+            <a:stretch>
+              <a:fillRect/>
+            </a:stretch>
+          </p:blipFill>
+          <p:spPr>
+            <a:xfrm>
+              <a:off x="10722486" y="4875629"/>
+              <a:ext cx="4602547" cy="3964741"/>
+            </a:xfrm>
+            <a:prstGeom prst="rect">
+              <a:avLst/>
+            </a:prstGeom>
+          </p:spPr>
+        </p:pic>
+        <p:sp>
+          <p:nvSpPr>
+            <p:cNvPr id="9" name="Rectangle 8">
+              <a:extLst>
+                <a:ext uri="{FF2B5EF4-FFF2-40B4-BE49-F238E27FC236}">
+                  <a16:creationId xmlns:a16="http://schemas.microsoft.com/office/drawing/2014/main" id="{2AFB6A11-A365-EC21-3BAA-0BD65FA12A41}"/>
+                </a:ext>
+              </a:extLst>
+            </p:cNvPr>
+            <p:cNvSpPr/>
+            <p:nvPr/>
+          </p:nvSpPr>
+          <p:spPr>
+            <a:xfrm>
+              <a:off x="12463975" y="6921136"/>
+              <a:ext cx="126610" cy="145477"/>
+            </a:xfrm>
+            <a:prstGeom prst="rect">
+              <a:avLst/>
+            </a:prstGeom>
+            <a:solidFill>
+              <a:schemeClr val="bg1"/>
+            </a:solidFill>
+            <a:ln>
+              <a:solidFill>
+                <a:schemeClr val="bg1"/>
+              </a:solidFill>
+            </a:ln>
+          </p:spPr>
+          <p:style>
+            <a:lnRef idx="2">
+              <a:schemeClr val="accent1">
+                <a:shade val="15000"/>
+              </a:schemeClr>
+            </a:lnRef>
+            <a:fillRef idx="1">
+              <a:schemeClr val="accent1"/>
+            </a:fillRef>
+            <a:effectRef idx="0">
+              <a:schemeClr val="accent1"/>
+            </a:effectRef>
+            <a:fontRef idx="minor">
+              <a:schemeClr val="lt1"/>
+            </a:fontRef>
+          </p:style>
+          <p:txBody>
+            <a:bodyPr rtlCol="0" anchor="ctr"/>
+            <a:lstStyle/>
+            <a:p>
+              <a:pPr algn="ctr"/>
+              <a:endParaRPr lang="en-US"/>
+            </a:p>
+          </p:txBody>
+        </p:sp>
+        <p:sp>
+          <p:nvSpPr>
+            <p:cNvPr id="10" name="Rectangle 9">
+              <a:extLst>
+                <a:ext uri="{FF2B5EF4-FFF2-40B4-BE49-F238E27FC236}">
+                  <a16:creationId xmlns:a16="http://schemas.microsoft.com/office/drawing/2014/main" id="{698E48F4-DEA0-CA71-3978-912C30E5C73E}"/>
+                </a:ext>
+              </a:extLst>
+            </p:cNvPr>
+            <p:cNvSpPr/>
+            <p:nvPr/>
+          </p:nvSpPr>
+          <p:spPr>
+            <a:xfrm>
+              <a:off x="12799255" y="6775659"/>
+              <a:ext cx="126610" cy="236918"/>
+            </a:xfrm>
+            <a:prstGeom prst="rect">
+              <a:avLst/>
+            </a:prstGeom>
+            <a:solidFill>
+              <a:schemeClr val="bg1"/>
+            </a:solidFill>
+            <a:ln>
+              <a:solidFill>
+                <a:schemeClr val="bg1"/>
+              </a:solidFill>
+            </a:ln>
+          </p:spPr>
+          <p:style>
+            <a:lnRef idx="2">
+              <a:schemeClr val="accent1">
+                <a:shade val="15000"/>
+              </a:schemeClr>
+            </a:lnRef>
+            <a:fillRef idx="1">
+              <a:schemeClr val="accent1"/>
+            </a:fillRef>
+            <a:effectRef idx="0">
+              <a:schemeClr val="accent1"/>
+            </a:effectRef>
+            <a:fontRef idx="minor">
+              <a:schemeClr val="lt1"/>
+            </a:fontRef>
+          </p:style>
+          <p:txBody>
+            <a:bodyPr rtlCol="0" anchor="ctr"/>
+            <a:lstStyle/>
+            <a:p>
+              <a:pPr algn="ctr"/>
+              <a:endParaRPr lang="en-US"/>
+            </a:p>
+          </p:txBody>
+        </p:sp>
+        <p:sp>
+          <p:nvSpPr>
+            <p:cNvPr id="11" name="Rectangle 10">
+              <a:extLst>
+                <a:ext uri="{FF2B5EF4-FFF2-40B4-BE49-F238E27FC236}">
+                  <a16:creationId xmlns:a16="http://schemas.microsoft.com/office/drawing/2014/main" id="{4A442248-268D-F35B-A910-D4F3F3B22C59}"/>
+                </a:ext>
+              </a:extLst>
+            </p:cNvPr>
+            <p:cNvSpPr/>
+            <p:nvPr/>
+          </p:nvSpPr>
+          <p:spPr>
+            <a:xfrm>
+              <a:off x="10663139" y="6189617"/>
+              <a:ext cx="703555" cy="1463039"/>
+            </a:xfrm>
+            <a:prstGeom prst="rect">
+              <a:avLst/>
+            </a:prstGeom>
+            <a:solidFill>
+              <a:schemeClr val="bg1"/>
+            </a:solidFill>
+            <a:ln>
+              <a:solidFill>
+                <a:schemeClr val="bg1"/>
+              </a:solidFill>
+            </a:ln>
+          </p:spPr>
+          <p:style>
+            <a:lnRef idx="2">
+              <a:schemeClr val="accent1">
+                <a:shade val="15000"/>
+              </a:schemeClr>
+            </a:lnRef>
+            <a:fillRef idx="1">
+              <a:schemeClr val="accent1"/>
+            </a:fillRef>
+            <a:effectRef idx="0">
+              <a:schemeClr val="accent1"/>
+            </a:effectRef>
+            <a:fontRef idx="minor">
+              <a:schemeClr val="lt1"/>
+            </a:fontRef>
+          </p:style>
+          <p:txBody>
+            <a:bodyPr rtlCol="0" anchor="ctr"/>
+            <a:lstStyle/>
+            <a:p>
+              <a:pPr algn="ctr"/>
+              <a:endParaRPr lang="en-US"/>
+            </a:p>
+          </p:txBody>
+        </p:sp>
+        <p:sp>
+          <p:nvSpPr>
+            <p:cNvPr id="12" name="Rectangle 11">
+              <a:extLst>
+                <a:ext uri="{FF2B5EF4-FFF2-40B4-BE49-F238E27FC236}">
+                  <a16:creationId xmlns:a16="http://schemas.microsoft.com/office/drawing/2014/main" id="{6C17C551-B540-B4A1-9E35-6E83AECF34E8}"/>
+                </a:ext>
+              </a:extLst>
+            </p:cNvPr>
+            <p:cNvSpPr/>
+            <p:nvPr/>
+          </p:nvSpPr>
+          <p:spPr>
+            <a:xfrm>
+              <a:off x="12645242" y="6428656"/>
+              <a:ext cx="126610" cy="236918"/>
+            </a:xfrm>
+            <a:prstGeom prst="rect">
+              <a:avLst/>
+            </a:prstGeom>
+            <a:solidFill>
+              <a:schemeClr val="bg1"/>
+            </a:solidFill>
+            <a:ln>
+              <a:solidFill>
+                <a:schemeClr val="bg1"/>
+              </a:solidFill>
+            </a:ln>
+          </p:spPr>
+          <p:style>
+            <a:lnRef idx="2">
+              <a:schemeClr val="accent1">
+                <a:shade val="15000"/>
+              </a:schemeClr>
+            </a:lnRef>
+            <a:fillRef idx="1">
+              <a:schemeClr val="accent1"/>
+            </a:fillRef>
+            <a:effectRef idx="0">
+              <a:schemeClr val="accent1"/>
+            </a:effectRef>
+            <a:fontRef idx="minor">
+              <a:schemeClr val="lt1"/>
+            </a:fontRef>
+          </p:style>
+          <p:txBody>
+            <a:bodyPr rtlCol="0" anchor="ctr"/>
+            <a:lstStyle/>
+            <a:p>
+              <a:pPr algn="ctr"/>
+              <a:endParaRPr lang="en-US"/>
+            </a:p>
+          </p:txBody>
+        </p:sp>
+        <p:sp>
+          <p:nvSpPr>
+            <p:cNvPr id="13" name="Rectangle 12">
+              <a:extLst>
+                <a:ext uri="{FF2B5EF4-FFF2-40B4-BE49-F238E27FC236}">
+                  <a16:creationId xmlns:a16="http://schemas.microsoft.com/office/drawing/2014/main" id="{742F183D-FA95-9260-9E74-4EA3A9DFDFB4}"/>
+                </a:ext>
+              </a:extLst>
+            </p:cNvPr>
+            <p:cNvSpPr/>
+            <p:nvPr/>
+          </p:nvSpPr>
+          <p:spPr>
+            <a:xfrm>
+              <a:off x="10798404" y="4997188"/>
+              <a:ext cx="568290" cy="422099"/>
+            </a:xfrm>
+            <a:prstGeom prst="rect">
+              <a:avLst/>
+            </a:prstGeom>
+            <a:solidFill>
+              <a:schemeClr val="bg1"/>
+            </a:solidFill>
+            <a:ln>
+              <a:solidFill>
+                <a:schemeClr val="bg1"/>
+              </a:solidFill>
+            </a:ln>
+          </p:spPr>
+          <p:style>
+            <a:lnRef idx="2">
+              <a:schemeClr val="accent1">
+                <a:shade val="15000"/>
+              </a:schemeClr>
+            </a:lnRef>
+            <a:fillRef idx="1">
+              <a:schemeClr val="accent1"/>
+            </a:fillRef>
+            <a:effectRef idx="0">
+              <a:schemeClr val="accent1"/>
+            </a:effectRef>
+            <a:fontRef idx="minor">
+              <a:schemeClr val="lt1"/>
+            </a:fontRef>
+          </p:style>
+          <p:txBody>
+            <a:bodyPr rtlCol="0" anchor="ctr"/>
+            <a:lstStyle/>
+            <a:p>
+              <a:pPr algn="ctr"/>
+              <a:endParaRPr lang="en-US"/>
+            </a:p>
+          </p:txBody>
+        </p:sp>
+      </p:grpSp>
+      <p:sp>
+        <p:nvSpPr>
+          <p:cNvPr id="20" name="Rectangle 19">
+            <a:extLst>
+              <a:ext uri="{FF2B5EF4-FFF2-40B4-BE49-F238E27FC236}">
+                <a16:creationId xmlns:a16="http://schemas.microsoft.com/office/drawing/2014/main" id="{92AAF09E-7B0C-C997-735E-A095370E73E8}"/>
+              </a:ext>
+            </a:extLst>
+          </p:cNvPr>
+          <p:cNvSpPr/>
+          <p:nvPr/>
+        </p:nvSpPr>
+        <p:spPr>
+          <a:xfrm>
+            <a:off x="5803253" y="7556654"/>
+            <a:ext cx="445931" cy="407979"/>
+          </a:xfrm>
+          <a:prstGeom prst="rect">
+            <a:avLst/>
+          </a:prstGeom>
+          <a:solidFill>
+            <a:schemeClr val="bg1"/>
+          </a:solidFill>
+          <a:ln>
+            <a:solidFill>
+              <a:schemeClr val="bg1"/>
+            </a:solidFill>
+          </a:ln>
+        </p:spPr>
+        <p:style>
+          <a:lnRef idx="2">
+            <a:schemeClr val="accent1">
+              <a:shade val="15000"/>
+            </a:schemeClr>
+          </a:lnRef>
+          <a:fillRef idx="1">
+            <a:schemeClr val="accent1"/>
+          </a:fillRef>
+          <a:effectRef idx="0">
+            <a:schemeClr val="accent1"/>
+          </a:effectRef>
+          <a:fontRef idx="minor">
+            <a:schemeClr val="lt1"/>
+          </a:fontRef>
+        </p:style>
+        <p:txBody>
+          <a:bodyPr rtlCol="0" anchor="ctr"/>
+          <a:lstStyle/>
+          <a:p>
+            <a:pPr algn="ctr"/>
+            <a:endParaRPr lang="en-US"/>
+          </a:p>
+        </p:txBody>
+      </p:sp>
+      <p:sp>
+        <p:nvSpPr>
+          <p:cNvPr id="21" name="Rectangle 20">
+            <a:extLst>
+              <a:ext uri="{FF2B5EF4-FFF2-40B4-BE49-F238E27FC236}">
+                <a16:creationId xmlns:a16="http://schemas.microsoft.com/office/drawing/2014/main" id="{9EC31FFD-B025-90FF-0E57-B4C640B8FEA7}"/>
+              </a:ext>
+            </a:extLst>
+          </p:cNvPr>
+          <p:cNvSpPr/>
+          <p:nvPr/>
+        </p:nvSpPr>
+        <p:spPr>
+          <a:xfrm>
+            <a:off x="6955864" y="7880706"/>
+            <a:ext cx="372590" cy="479728"/>
+          </a:xfrm>
+          <a:prstGeom prst="rect">
+            <a:avLst/>
+          </a:prstGeom>
+          <a:solidFill>
+            <a:schemeClr val="bg1"/>
+          </a:solidFill>
+          <a:ln>
+            <a:solidFill>
+              <a:schemeClr val="bg1"/>
+            </a:solidFill>
+          </a:ln>
+        </p:spPr>
+        <p:style>
+          <a:lnRef idx="2">
+            <a:schemeClr val="accent1">
+              <a:shade val="15000"/>
+            </a:schemeClr>
+          </a:lnRef>
+          <a:fillRef idx="1">
+            <a:schemeClr val="accent1"/>
+          </a:fillRef>
+          <a:effectRef idx="0">
+            <a:schemeClr val="accent1"/>
+          </a:effectRef>
+          <a:fontRef idx="minor">
+            <a:schemeClr val="lt1"/>
+          </a:fontRef>
+        </p:style>
+        <p:txBody>
+          <a:bodyPr rtlCol="0" anchor="ctr"/>
+          <a:lstStyle/>
+          <a:p>
+            <a:pPr algn="ctr"/>
+            <a:endParaRPr lang="en-US"/>
+          </a:p>
+        </p:txBody>
+      </p:sp>
+      <p:sp>
+        <p:nvSpPr>
+          <p:cNvPr id="22" name="TextBox 21">
+            <a:extLst>
+              <a:ext uri="{FF2B5EF4-FFF2-40B4-BE49-F238E27FC236}">
+                <a16:creationId xmlns:a16="http://schemas.microsoft.com/office/drawing/2014/main" id="{C392419F-E7E3-7BCA-E289-2E7679A72970}"/>
+              </a:ext>
+            </a:extLst>
+          </p:cNvPr>
+          <p:cNvSpPr txBox="1"/>
+          <p:nvPr/>
+        </p:nvSpPr>
+        <p:spPr>
+          <a:xfrm>
+            <a:off x="901522" y="5191261"/>
+            <a:ext cx="2724807" cy="400110"/>
+          </a:xfrm>
+          <a:prstGeom prst="rect">
+            <a:avLst/>
+          </a:prstGeom>
+          <a:noFill/>
+        </p:spPr>
+        <p:txBody>
+          <a:bodyPr wrap="square" rtlCol="0">
+            <a:spAutoFit/>
+          </a:bodyPr>
+          <a:lstStyle/>
+          <a:p>
+            <a:r>
+              <a:rPr lang="en-US" sz="2000" dirty="0"/>
+              <a:t>Species divergence</a:t>
+            </a:r>
+          </a:p>
+        </p:txBody>
+      </p:sp>
+      <p:sp>
+        <p:nvSpPr>
+          <p:cNvPr id="23" name="TextBox 22">
+            <a:extLst>
+              <a:ext uri="{FF2B5EF4-FFF2-40B4-BE49-F238E27FC236}">
+                <a16:creationId xmlns:a16="http://schemas.microsoft.com/office/drawing/2014/main" id="{B1F4B850-602D-8E02-F60D-8B339654DFF5}"/>
+              </a:ext>
+            </a:extLst>
+          </p:cNvPr>
+          <p:cNvSpPr txBox="1"/>
+          <p:nvPr/>
+        </p:nvSpPr>
+        <p:spPr>
+          <a:xfrm>
+            <a:off x="2063676" y="4415092"/>
+            <a:ext cx="2724807" cy="400110"/>
+          </a:xfrm>
+          <a:prstGeom prst="rect">
+            <a:avLst/>
+          </a:prstGeom>
+          <a:noFill/>
+        </p:spPr>
+        <p:txBody>
+          <a:bodyPr wrap="square" rtlCol="0">
+            <a:spAutoFit/>
+          </a:bodyPr>
+          <a:lstStyle/>
+          <a:p>
+            <a:r>
+              <a:rPr lang="en-US" sz="2000" dirty="0"/>
+              <a:t>Gene divergence</a:t>
+            </a:r>
+          </a:p>
+        </p:txBody>
+      </p:sp>
+      <p:cxnSp>
+        <p:nvCxnSpPr>
+          <p:cNvPr id="15" name="Straight Arrow Connector 14">
+            <a:extLst>
+              <a:ext uri="{FF2B5EF4-FFF2-40B4-BE49-F238E27FC236}">
+                <a16:creationId xmlns:a16="http://schemas.microsoft.com/office/drawing/2014/main" id="{535D031D-F967-A7D9-CF2D-C6DCA08DFC01}"/>
+              </a:ext>
+            </a:extLst>
+          </p:cNvPr>
+          <p:cNvCxnSpPr>
+            <a:cxnSpLocks/>
+          </p:cNvCxnSpPr>
+          <p:nvPr/>
+        </p:nvCxnSpPr>
+        <p:spPr>
+          <a:xfrm flipH="1">
+            <a:off x="4145562" y="4610427"/>
+            <a:ext cx="681331" cy="0"/>
+          </a:xfrm>
+          <a:prstGeom prst="straightConnector1">
+            <a:avLst/>
+          </a:prstGeom>
+          <a:ln w="38100">
+            <a:solidFill>
+              <a:srgbClr val="C00000"/>
+            </a:solidFill>
+            <a:headEnd type="none" w="med" len="med"/>
+            <a:tailEnd type="arrow" w="med" len="med"/>
+          </a:ln>
+        </p:spPr>
+        <p:style>
+          <a:lnRef idx="1">
+            <a:schemeClr val="accent1"/>
+          </a:lnRef>
+          <a:fillRef idx="0">
+            <a:schemeClr val="accent1"/>
+          </a:fillRef>
+          <a:effectRef idx="0">
+            <a:schemeClr val="accent1"/>
+          </a:effectRef>
+          <a:fontRef idx="minor">
+            <a:schemeClr val="tx1"/>
+          </a:fontRef>
+        </p:style>
+      </p:cxnSp>
+      <p:sp>
+        <p:nvSpPr>
+          <p:cNvPr id="29" name="TextBox 28">
+            <a:extLst>
+              <a:ext uri="{FF2B5EF4-FFF2-40B4-BE49-F238E27FC236}">
+                <a16:creationId xmlns:a16="http://schemas.microsoft.com/office/drawing/2014/main" id="{9899E135-87D3-02B1-3971-418E7712BB2B}"/>
+              </a:ext>
+            </a:extLst>
+          </p:cNvPr>
+          <p:cNvSpPr txBox="1"/>
+          <p:nvPr/>
+        </p:nvSpPr>
+        <p:spPr>
+          <a:xfrm>
+            <a:off x="937874" y="6603121"/>
+            <a:ext cx="2251604" cy="707886"/>
+          </a:xfrm>
+          <a:prstGeom prst="rect">
+            <a:avLst/>
+          </a:prstGeom>
+          <a:noFill/>
+        </p:spPr>
+        <p:txBody>
+          <a:bodyPr wrap="square" rtlCol="0">
+            <a:spAutoFit/>
+          </a:bodyPr>
+          <a:lstStyle/>
+          <a:p>
+            <a:pPr algn="ctr"/>
+            <a:r>
+              <a:rPr lang="en-US" sz="2000" dirty="0"/>
+              <a:t>Incomplete lineage sorting</a:t>
+            </a:r>
+          </a:p>
+        </p:txBody>
+      </p:sp>
+      <p:sp>
+        <p:nvSpPr>
+          <p:cNvPr id="37" name="Rectangle 36">
+            <a:extLst>
+              <a:ext uri="{FF2B5EF4-FFF2-40B4-BE49-F238E27FC236}">
+                <a16:creationId xmlns:a16="http://schemas.microsoft.com/office/drawing/2014/main" id="{59061CEE-E5AA-10DF-8796-13768E5A7A2B}"/>
+              </a:ext>
+            </a:extLst>
+          </p:cNvPr>
+          <p:cNvSpPr/>
+          <p:nvPr/>
+        </p:nvSpPr>
+        <p:spPr>
+          <a:xfrm>
+            <a:off x="10257777" y="7598557"/>
+            <a:ext cx="499220" cy="479728"/>
+          </a:xfrm>
+          <a:prstGeom prst="rect">
+            <a:avLst/>
+          </a:prstGeom>
+          <a:solidFill>
+            <a:schemeClr val="bg1"/>
+          </a:solidFill>
+          <a:ln>
+            <a:solidFill>
+              <a:schemeClr val="bg1"/>
+            </a:solidFill>
+          </a:ln>
+        </p:spPr>
+        <p:style>
+          <a:lnRef idx="2">
+            <a:schemeClr val="accent1">
+              <a:shade val="15000"/>
+            </a:schemeClr>
+          </a:lnRef>
+          <a:fillRef idx="1">
+            <a:schemeClr val="accent1"/>
+          </a:fillRef>
+          <a:effectRef idx="0">
+            <a:schemeClr val="accent1"/>
+          </a:effectRef>
+          <a:fontRef idx="minor">
+            <a:schemeClr val="lt1"/>
+          </a:fontRef>
+        </p:style>
+        <p:txBody>
+          <a:bodyPr rtlCol="0" anchor="ctr"/>
+          <a:lstStyle/>
+          <a:p>
+            <a:pPr algn="ctr"/>
+            <a:endParaRPr lang="en-US"/>
+          </a:p>
+        </p:txBody>
+      </p:sp>
+      <p:sp>
+        <p:nvSpPr>
+          <p:cNvPr id="38" name="Rectangle 37">
+            <a:extLst>
+              <a:ext uri="{FF2B5EF4-FFF2-40B4-BE49-F238E27FC236}">
+                <a16:creationId xmlns:a16="http://schemas.microsoft.com/office/drawing/2014/main" id="{BC96E83F-81C5-341B-4C29-8C7E09084E1C}"/>
+              </a:ext>
+            </a:extLst>
+          </p:cNvPr>
+          <p:cNvSpPr/>
+          <p:nvPr/>
+        </p:nvSpPr>
+        <p:spPr>
+          <a:xfrm>
+            <a:off x="10756245" y="7113370"/>
+            <a:ext cx="325427" cy="242990"/>
+          </a:xfrm>
+          <a:prstGeom prst="rect">
+            <a:avLst/>
+          </a:prstGeom>
+          <a:solidFill>
+            <a:schemeClr val="bg1"/>
+          </a:solidFill>
+          <a:ln>
+            <a:solidFill>
+              <a:schemeClr val="bg1"/>
+            </a:solidFill>
+          </a:ln>
+        </p:spPr>
+        <p:style>
+          <a:lnRef idx="2">
+            <a:schemeClr val="accent1">
+              <a:shade val="15000"/>
+            </a:schemeClr>
+          </a:lnRef>
+          <a:fillRef idx="1">
+            <a:schemeClr val="accent1"/>
+          </a:fillRef>
+          <a:effectRef idx="0">
+            <a:schemeClr val="accent1"/>
+          </a:effectRef>
+          <a:fontRef idx="minor">
+            <a:schemeClr val="lt1"/>
+          </a:fontRef>
+        </p:style>
+        <p:txBody>
+          <a:bodyPr rtlCol="0" anchor="ctr"/>
+          <a:lstStyle/>
+          <a:p>
+            <a:pPr algn="ctr"/>
+            <a:endParaRPr lang="en-US"/>
+          </a:p>
+        </p:txBody>
+      </p:sp>
+      <p:sp>
+        <p:nvSpPr>
+          <p:cNvPr id="39" name="Rectangle 38">
+            <a:extLst>
+              <a:ext uri="{FF2B5EF4-FFF2-40B4-BE49-F238E27FC236}">
+                <a16:creationId xmlns:a16="http://schemas.microsoft.com/office/drawing/2014/main" id="{7BA4C78C-66A3-6BD1-3075-3C2BB4DA0301}"/>
+              </a:ext>
+            </a:extLst>
+          </p:cNvPr>
+          <p:cNvSpPr/>
+          <p:nvPr/>
+        </p:nvSpPr>
+        <p:spPr>
+          <a:xfrm>
+            <a:off x="11458998" y="7972928"/>
+            <a:ext cx="358767" cy="479728"/>
+          </a:xfrm>
+          <a:prstGeom prst="rect">
+            <a:avLst/>
+          </a:prstGeom>
+          <a:solidFill>
+            <a:schemeClr val="bg1"/>
+          </a:solidFill>
+          <a:ln>
+            <a:solidFill>
+              <a:schemeClr val="bg1"/>
+            </a:solidFill>
+          </a:ln>
+        </p:spPr>
+        <p:style>
+          <a:lnRef idx="2">
+            <a:schemeClr val="accent1">
+              <a:shade val="15000"/>
+            </a:schemeClr>
+          </a:lnRef>
+          <a:fillRef idx="1">
+            <a:schemeClr val="accent1"/>
+          </a:fillRef>
+          <a:effectRef idx="0">
+            <a:schemeClr val="accent1"/>
+          </a:effectRef>
+          <a:fontRef idx="minor">
+            <a:schemeClr val="lt1"/>
+          </a:fontRef>
+        </p:style>
+        <p:txBody>
+          <a:bodyPr rtlCol="0" anchor="ctr"/>
+          <a:lstStyle/>
+          <a:p>
+            <a:pPr algn="ctr"/>
+            <a:endParaRPr lang="en-US"/>
+          </a:p>
+        </p:txBody>
+      </p:sp>
+      <p:sp>
+        <p:nvSpPr>
+          <p:cNvPr id="40" name="Rectangle 39">
+            <a:extLst>
+              <a:ext uri="{FF2B5EF4-FFF2-40B4-BE49-F238E27FC236}">
+                <a16:creationId xmlns:a16="http://schemas.microsoft.com/office/drawing/2014/main" id="{3E4A1CA8-3E88-D5F0-F96A-76034D20F710}"/>
+              </a:ext>
+            </a:extLst>
+          </p:cNvPr>
+          <p:cNvSpPr/>
+          <p:nvPr/>
+        </p:nvSpPr>
+        <p:spPr>
+          <a:xfrm>
+            <a:off x="14338416" y="7484905"/>
+            <a:ext cx="358767" cy="479728"/>
+          </a:xfrm>
+          <a:prstGeom prst="rect">
+            <a:avLst/>
+          </a:prstGeom>
+          <a:solidFill>
+            <a:schemeClr val="bg1"/>
+          </a:solidFill>
+          <a:ln>
+            <a:solidFill>
+              <a:schemeClr val="bg1"/>
+            </a:solidFill>
+          </a:ln>
+        </p:spPr>
+        <p:style>
+          <a:lnRef idx="2">
+            <a:schemeClr val="accent1">
+              <a:shade val="15000"/>
+            </a:schemeClr>
+          </a:lnRef>
+          <a:fillRef idx="1">
+            <a:schemeClr val="accent1"/>
+          </a:fillRef>
+          <a:effectRef idx="0">
+            <a:schemeClr val="accent1"/>
+          </a:effectRef>
+          <a:fontRef idx="minor">
+            <a:schemeClr val="lt1"/>
+          </a:fontRef>
+        </p:style>
+        <p:txBody>
+          <a:bodyPr rtlCol="0" anchor="ctr"/>
+          <a:lstStyle/>
+          <a:p>
+            <a:pPr algn="ctr" rtl="0"/>
+            <a:endParaRPr lang="en-US"/>
+          </a:p>
+        </p:txBody>
+      </p:sp>
+      <p:sp>
+        <p:nvSpPr>
+          <p:cNvPr id="41" name="Rectangle 40">
+            <a:extLst>
+              <a:ext uri="{FF2B5EF4-FFF2-40B4-BE49-F238E27FC236}">
+                <a16:creationId xmlns:a16="http://schemas.microsoft.com/office/drawing/2014/main" id="{44E5251A-2CB9-B68B-E262-824DF688947E}"/>
+              </a:ext>
+            </a:extLst>
+          </p:cNvPr>
+          <p:cNvSpPr/>
+          <p:nvPr/>
+        </p:nvSpPr>
+        <p:spPr>
+          <a:xfrm>
+            <a:off x="12519766" y="7908002"/>
+            <a:ext cx="287371" cy="197579"/>
+          </a:xfrm>
+          <a:prstGeom prst="rect">
+            <a:avLst/>
+          </a:prstGeom>
+          <a:solidFill>
+            <a:schemeClr val="bg1"/>
+          </a:solidFill>
+          <a:ln>
+            <a:solidFill>
+              <a:schemeClr val="bg1"/>
+            </a:solidFill>
+          </a:ln>
+        </p:spPr>
+        <p:style>
+          <a:lnRef idx="2">
+            <a:schemeClr val="accent1">
+              <a:shade val="15000"/>
+            </a:schemeClr>
+          </a:lnRef>
+          <a:fillRef idx="1">
+            <a:schemeClr val="accent1"/>
+          </a:fillRef>
+          <a:effectRef idx="0">
+            <a:schemeClr val="accent1"/>
+          </a:effectRef>
+          <a:fontRef idx="minor">
+            <a:schemeClr val="lt1"/>
+          </a:fontRef>
+        </p:style>
+        <p:txBody>
+          <a:bodyPr rtlCol="0" anchor="ctr"/>
+          <a:lstStyle/>
+          <a:p>
+            <a:pPr algn="ctr" rtl="0"/>
+            <a:endParaRPr lang="en-US"/>
+          </a:p>
+        </p:txBody>
+      </p:sp>
+      <p:sp>
+        <p:nvSpPr>
+          <p:cNvPr id="34" name="Freeform 33">
+            <a:extLst>
+              <a:ext uri="{FF2B5EF4-FFF2-40B4-BE49-F238E27FC236}">
+                <a16:creationId xmlns:a16="http://schemas.microsoft.com/office/drawing/2014/main" id="{4F6ED085-E3E3-CA6E-135A-1DA2CF4BA841}"/>
+              </a:ext>
+            </a:extLst>
+          </p:cNvPr>
+          <p:cNvSpPr/>
+          <p:nvPr/>
+        </p:nvSpPr>
+        <p:spPr>
+          <a:xfrm>
+            <a:off x="4807557" y="5464400"/>
+            <a:ext cx="296471" cy="308265"/>
+          </a:xfrm>
+          <a:custGeom>
+            <a:avLst/>
+            <a:gdLst>
+              <a:gd name="connsiteX0" fmla="*/ 0 w 532660"/>
+              <a:gd name="connsiteY0" fmla="*/ 497149 h 497149"/>
+              <a:gd name="connsiteX1" fmla="*/ 88777 w 532660"/>
+              <a:gd name="connsiteY1" fmla="*/ 435006 h 497149"/>
+              <a:gd name="connsiteX2" fmla="*/ 106532 w 532660"/>
+              <a:gd name="connsiteY2" fmla="*/ 417250 h 497149"/>
+              <a:gd name="connsiteX3" fmla="*/ 142043 w 532660"/>
+              <a:gd name="connsiteY3" fmla="*/ 399495 h 497149"/>
+              <a:gd name="connsiteX4" fmla="*/ 186431 w 532660"/>
+              <a:gd name="connsiteY4" fmla="*/ 372862 h 497149"/>
+              <a:gd name="connsiteX5" fmla="*/ 221942 w 532660"/>
+              <a:gd name="connsiteY5" fmla="*/ 346229 h 497149"/>
+              <a:gd name="connsiteX6" fmla="*/ 248575 w 532660"/>
+              <a:gd name="connsiteY6" fmla="*/ 328473 h 497149"/>
+              <a:gd name="connsiteX7" fmla="*/ 266330 w 532660"/>
+              <a:gd name="connsiteY7" fmla="*/ 301840 h 497149"/>
+              <a:gd name="connsiteX8" fmla="*/ 284086 w 532660"/>
+              <a:gd name="connsiteY8" fmla="*/ 284085 h 497149"/>
+              <a:gd name="connsiteX9" fmla="*/ 292963 w 532660"/>
+              <a:gd name="connsiteY9" fmla="*/ 248574 h 497149"/>
+              <a:gd name="connsiteX10" fmla="*/ 310719 w 532660"/>
+              <a:gd name="connsiteY10" fmla="*/ 221941 h 497149"/>
+              <a:gd name="connsiteX11" fmla="*/ 328474 w 532660"/>
+              <a:gd name="connsiteY11" fmla="*/ 168675 h 497149"/>
+              <a:gd name="connsiteX12" fmla="*/ 355107 w 532660"/>
+              <a:gd name="connsiteY12" fmla="*/ 142042 h 497149"/>
+              <a:gd name="connsiteX13" fmla="*/ 372862 w 532660"/>
+              <a:gd name="connsiteY13" fmla="*/ 115409 h 497149"/>
+              <a:gd name="connsiteX14" fmla="*/ 399495 w 532660"/>
+              <a:gd name="connsiteY14" fmla="*/ 97654 h 497149"/>
+              <a:gd name="connsiteX15" fmla="*/ 443884 w 532660"/>
+              <a:gd name="connsiteY15" fmla="*/ 71021 h 497149"/>
+              <a:gd name="connsiteX16" fmla="*/ 497150 w 532660"/>
+              <a:gd name="connsiteY16" fmla="*/ 26633 h 497149"/>
+              <a:gd name="connsiteX17" fmla="*/ 532660 w 532660"/>
+              <a:gd name="connsiteY17" fmla="*/ 0 h 497149"/>
+            </a:gdLst>
+            <a:ahLst/>
+            <a:cxnLst>
+              <a:cxn ang="0">
+                <a:pos x="connsiteX0" y="connsiteY0"/>
+              </a:cxn>
+              <a:cxn ang="0">
+                <a:pos x="connsiteX1" y="connsiteY1"/>
+              </a:cxn>
+              <a:cxn ang="0">
+                <a:pos x="connsiteX2" y="connsiteY2"/>
+              </a:cxn>
+              <a:cxn ang="0">
+                <a:pos x="connsiteX3" y="connsiteY3"/>
+              </a:cxn>
+              <a:cxn ang="0">
+                <a:pos x="connsiteX4" y="connsiteY4"/>
+              </a:cxn>
+              <a:cxn ang="0">
+                <a:pos x="connsiteX5" y="connsiteY5"/>
+              </a:cxn>
+              <a:cxn ang="0">
+                <a:pos x="connsiteX6" y="connsiteY6"/>
+              </a:cxn>
+              <a:cxn ang="0">
+                <a:pos x="connsiteX7" y="connsiteY7"/>
+              </a:cxn>
+              <a:cxn ang="0">
+                <a:pos x="connsiteX8" y="connsiteY8"/>
+              </a:cxn>
+              <a:cxn ang="0">
+                <a:pos x="connsiteX9" y="connsiteY9"/>
+              </a:cxn>
+              <a:cxn ang="0">
+                <a:pos x="connsiteX10" y="connsiteY10"/>
+              </a:cxn>
+              <a:cxn ang="0">
+                <a:pos x="connsiteX11" y="connsiteY11"/>
+              </a:cxn>
+              <a:cxn ang="0">
+                <a:pos x="connsiteX12" y="connsiteY12"/>
+              </a:cxn>
+              <a:cxn ang="0">
+                <a:pos x="connsiteX13" y="connsiteY13"/>
+              </a:cxn>
+              <a:cxn ang="0">
+                <a:pos x="connsiteX14" y="connsiteY14"/>
+              </a:cxn>
+              <a:cxn ang="0">
+                <a:pos x="connsiteX15" y="connsiteY15"/>
+              </a:cxn>
+              <a:cxn ang="0">
+                <a:pos x="connsiteX16" y="connsiteY16"/>
+              </a:cxn>
+              <a:cxn ang="0">
+                <a:pos x="connsiteX17" y="connsiteY17"/>
+              </a:cxn>
+            </a:cxnLst>
+            <a:rect l="l" t="t" r="r" b="b"/>
+            <a:pathLst>
+              <a:path w="532660" h="497149">
+                <a:moveTo>
+                  <a:pt x="0" y="497149"/>
+                </a:moveTo>
+                <a:cubicBezTo>
+                  <a:pt x="29592" y="476435"/>
+                  <a:pt x="63236" y="460549"/>
+                  <a:pt x="88777" y="435006"/>
+                </a:cubicBezTo>
+                <a:cubicBezTo>
+                  <a:pt x="94695" y="429087"/>
+                  <a:pt x="99568" y="421893"/>
+                  <a:pt x="106532" y="417250"/>
+                </a:cubicBezTo>
+                <a:cubicBezTo>
+                  <a:pt x="117543" y="409909"/>
+                  <a:pt x="130206" y="405413"/>
+                  <a:pt x="142043" y="399495"/>
+                </a:cubicBezTo>
+                <a:cubicBezTo>
+                  <a:pt x="183593" y="357943"/>
+                  <a:pt x="132652" y="403592"/>
+                  <a:pt x="186431" y="372862"/>
+                </a:cubicBezTo>
+                <a:cubicBezTo>
+                  <a:pt x="199278" y="365521"/>
+                  <a:pt x="209902" y="354829"/>
+                  <a:pt x="221942" y="346229"/>
+                </a:cubicBezTo>
+                <a:cubicBezTo>
+                  <a:pt x="230624" y="340027"/>
+                  <a:pt x="239697" y="334392"/>
+                  <a:pt x="248575" y="328473"/>
+                </a:cubicBezTo>
+                <a:cubicBezTo>
+                  <a:pt x="254493" y="319595"/>
+                  <a:pt x="259665" y="310171"/>
+                  <a:pt x="266330" y="301840"/>
+                </a:cubicBezTo>
+                <a:cubicBezTo>
+                  <a:pt x="271559" y="295304"/>
+                  <a:pt x="280343" y="291571"/>
+                  <a:pt x="284086" y="284085"/>
+                </a:cubicBezTo>
+                <a:cubicBezTo>
+                  <a:pt x="289543" y="273172"/>
+                  <a:pt x="288157" y="259789"/>
+                  <a:pt x="292963" y="248574"/>
+                </a:cubicBezTo>
+                <a:cubicBezTo>
+                  <a:pt x="297166" y="238767"/>
+                  <a:pt x="304800" y="230819"/>
+                  <a:pt x="310719" y="221941"/>
+                </a:cubicBezTo>
+                <a:cubicBezTo>
+                  <a:pt x="316637" y="204186"/>
+                  <a:pt x="315240" y="181909"/>
+                  <a:pt x="328474" y="168675"/>
+                </a:cubicBezTo>
+                <a:cubicBezTo>
+                  <a:pt x="337352" y="159797"/>
+                  <a:pt x="347070" y="151687"/>
+                  <a:pt x="355107" y="142042"/>
+                </a:cubicBezTo>
+                <a:cubicBezTo>
+                  <a:pt x="361937" y="133845"/>
+                  <a:pt x="365317" y="122954"/>
+                  <a:pt x="372862" y="115409"/>
+                </a:cubicBezTo>
+                <a:cubicBezTo>
+                  <a:pt x="380407" y="107864"/>
+                  <a:pt x="391163" y="104319"/>
+                  <a:pt x="399495" y="97654"/>
+                </a:cubicBezTo>
+                <a:cubicBezTo>
+                  <a:pt x="434313" y="69800"/>
+                  <a:pt x="397633" y="86439"/>
+                  <a:pt x="443884" y="71021"/>
+                </a:cubicBezTo>
+                <a:cubicBezTo>
+                  <a:pt x="507157" y="7748"/>
+                  <a:pt x="435345" y="76078"/>
+                  <a:pt x="497150" y="26633"/>
+                </a:cubicBezTo>
+                <a:cubicBezTo>
+                  <a:pt x="534541" y="-3280"/>
+                  <a:pt x="495595" y="18532"/>
+                  <a:pt x="532660" y="0"/>
+                </a:cubicBezTo>
+              </a:path>
+            </a:pathLst>
+          </a:custGeom>
+          <a:noFill/>
+          <a:ln w="50800">
+            <a:solidFill>
+              <a:schemeClr val="accent2">
+                <a:lumMod val="75000"/>
+              </a:schemeClr>
+            </a:solidFill>
+          </a:ln>
+        </p:spPr>
+        <p:style>
+          <a:lnRef idx="2">
+            <a:schemeClr val="accent1">
+              <a:shade val="50000"/>
+            </a:schemeClr>
+          </a:lnRef>
+          <a:fillRef idx="1">
+            <a:schemeClr val="accent1"/>
+          </a:fillRef>
+          <a:effectRef idx="0">
+            <a:schemeClr val="accent1"/>
+          </a:effectRef>
+          <a:fontRef idx="minor">
+            <a:schemeClr val="lt1"/>
+          </a:fontRef>
+        </p:style>
+        <p:txBody>
+          <a:bodyPr rtlCol="0" anchor="ctr"/>
+          <a:lstStyle/>
+          <a:p>
+            <a:pPr algn="ctr"/>
+            <a:endParaRPr lang="en-US">
+              <a:solidFill>
+                <a:schemeClr val="tx1"/>
+              </a:solidFill>
+            </a:endParaRPr>
+          </a:p>
+        </p:txBody>
+      </p:sp>
+      <p:sp>
+        <p:nvSpPr>
+          <p:cNvPr id="47" name="Rectangle 46">
+            <a:extLst>
+              <a:ext uri="{FF2B5EF4-FFF2-40B4-BE49-F238E27FC236}">
+                <a16:creationId xmlns:a16="http://schemas.microsoft.com/office/drawing/2014/main" id="{4D15210D-4BCB-88E6-8BDE-DB44EDDC1039}"/>
+              </a:ext>
+            </a:extLst>
+          </p:cNvPr>
+          <p:cNvSpPr/>
+          <p:nvPr/>
+        </p:nvSpPr>
+        <p:spPr>
+          <a:xfrm>
+            <a:off x="3127109" y="5208236"/>
+            <a:ext cx="499220" cy="1324765"/>
+          </a:xfrm>
+          <a:prstGeom prst="rect">
+            <a:avLst/>
+          </a:prstGeom>
+          <a:solidFill>
+            <a:schemeClr val="bg1"/>
+          </a:solidFill>
+          <a:ln>
+            <a:solidFill>
+              <a:schemeClr val="bg1"/>
+            </a:solidFill>
+          </a:ln>
+        </p:spPr>
+        <p:style>
+          <a:lnRef idx="2">
+            <a:schemeClr val="accent1">
+              <a:shade val="15000"/>
+            </a:schemeClr>
+          </a:lnRef>
+          <a:fillRef idx="1">
+            <a:schemeClr val="accent1"/>
+          </a:fillRef>
+          <a:effectRef idx="0">
+            <a:schemeClr val="accent1"/>
+          </a:effectRef>
+          <a:fontRef idx="minor">
+            <a:schemeClr val="lt1"/>
+          </a:fontRef>
+        </p:style>
+        <p:txBody>
+          <a:bodyPr rtlCol="0" anchor="ctr"/>
+          <a:lstStyle/>
+          <a:p>
+            <a:pPr algn="ctr"/>
+            <a:endParaRPr lang="en-US"/>
+          </a:p>
+        </p:txBody>
+      </p:sp>
+      <p:cxnSp>
+        <p:nvCxnSpPr>
+          <p:cNvPr id="24" name="Straight Arrow Connector 23">
+            <a:extLst>
+              <a:ext uri="{FF2B5EF4-FFF2-40B4-BE49-F238E27FC236}">
+                <a16:creationId xmlns:a16="http://schemas.microsoft.com/office/drawing/2014/main" id="{E1A116D0-1E27-3FA1-EC10-5E96E023AD1F}"/>
+              </a:ext>
+            </a:extLst>
+          </p:cNvPr>
+          <p:cNvCxnSpPr>
+            <a:cxnSpLocks/>
+          </p:cNvCxnSpPr>
+          <p:nvPr/>
+        </p:nvCxnSpPr>
+        <p:spPr>
+          <a:xfrm flipH="1">
+            <a:off x="3159059" y="5391316"/>
+            <a:ext cx="681331" cy="0"/>
+          </a:xfrm>
+          <a:prstGeom prst="straightConnector1">
+            <a:avLst/>
+          </a:prstGeom>
+          <a:ln w="38100">
+            <a:solidFill>
+              <a:srgbClr val="C00000"/>
+            </a:solidFill>
+            <a:headEnd type="none" w="med" len="med"/>
+            <a:tailEnd type="arrow" w="med" len="med"/>
+          </a:ln>
+        </p:spPr>
+        <p:style>
+          <a:lnRef idx="1">
+            <a:schemeClr val="accent1"/>
+          </a:lnRef>
+          <a:fillRef idx="0">
+            <a:schemeClr val="accent1"/>
+          </a:fillRef>
+          <a:effectRef idx="0">
+            <a:schemeClr val="accent1"/>
+          </a:effectRef>
+          <a:fontRef idx="minor">
+            <a:schemeClr val="tx1"/>
+          </a:fontRef>
+        </p:style>
+      </p:cxnSp>
+      <p:cxnSp>
+        <p:nvCxnSpPr>
+          <p:cNvPr id="28" name="Curved Connector 27">
+            <a:extLst>
+              <a:ext uri="{FF2B5EF4-FFF2-40B4-BE49-F238E27FC236}">
+                <a16:creationId xmlns:a16="http://schemas.microsoft.com/office/drawing/2014/main" id="{53ECCFB4-C363-34FA-54E5-8777BC67D86D}"/>
+              </a:ext>
+            </a:extLst>
+          </p:cNvPr>
+          <p:cNvCxnSpPr>
+            <a:cxnSpLocks/>
+          </p:cNvCxnSpPr>
+          <p:nvPr/>
+        </p:nvCxnSpPr>
+        <p:spPr>
+          <a:xfrm flipV="1">
+            <a:off x="2762806" y="6209262"/>
+            <a:ext cx="1227825" cy="479728"/>
+          </a:xfrm>
+          <a:prstGeom prst="curvedConnector3">
+            <a:avLst>
+              <a:gd name="adj1" fmla="val 351"/>
+            </a:avLst>
+          </a:prstGeom>
+          <a:ln w="38100">
+            <a:solidFill>
+              <a:srgbClr val="C00000"/>
+            </a:solidFill>
+            <a:tailEnd type="triangle"/>
+          </a:ln>
+        </p:spPr>
+        <p:style>
+          <a:lnRef idx="2">
+            <a:schemeClr val="accent1"/>
+          </a:lnRef>
+          <a:fillRef idx="0">
+            <a:schemeClr val="accent1"/>
+          </a:fillRef>
+          <a:effectRef idx="1">
+            <a:schemeClr val="accent1"/>
+          </a:effectRef>
+          <a:fontRef idx="minor">
+            <a:schemeClr val="tx1"/>
+          </a:fontRef>
+        </p:style>
+      </p:cxnSp>
+      <p:pic>
+        <p:nvPicPr>
+          <p:cNvPr id="48" name="Picture 47" descr="A picture containing line, diagram, design&#10;&#10;Description automatically generated">
+            <a:extLst>
+              <a:ext uri="{FF2B5EF4-FFF2-40B4-BE49-F238E27FC236}">
+                <a16:creationId xmlns:a16="http://schemas.microsoft.com/office/drawing/2014/main" id="{4AB5AD0D-E12C-5016-3579-BE9889B6D053}"/>
+              </a:ext>
+            </a:extLst>
+          </p:cNvPr>
+          <p:cNvPicPr>
+            <a:picLocks noChangeAspect="1"/>
+          </p:cNvPicPr>
+          <p:nvPr/>
+        </p:nvPicPr>
+        <p:blipFill>
+          <a:blip r:embed="rId2">
+            <a:extLst>
+              <a:ext uri="{28A0092B-C50C-407E-A947-70E740481C1C}">
+                <a14:useLocalDpi xmlns:a14="http://schemas.microsoft.com/office/drawing/2010/main" val="0"/>
+              </a:ext>
+            </a:extLst>
+          </a:blip>
+          <a:srcRect t="36081" r="88428" b="40640"/>
+          <a:stretch/>
+        </p:blipFill>
+        <p:spPr>
+          <a:xfrm>
+            <a:off x="6473772" y="4467882"/>
+            <a:ext cx="444156" cy="940644"/>
+          </a:xfrm>
+          <a:prstGeom prst="rect">
+            <a:avLst/>
+          </a:prstGeom>
+        </p:spPr>
+      </p:pic>
+      <p:sp>
+        <p:nvSpPr>
+          <p:cNvPr id="49" name="TextBox 48">
+            <a:extLst>
+              <a:ext uri="{FF2B5EF4-FFF2-40B4-BE49-F238E27FC236}">
+                <a16:creationId xmlns:a16="http://schemas.microsoft.com/office/drawing/2014/main" id="{DE298F29-7159-557E-7FAD-B7A75B44BDAC}"/>
+              </a:ext>
+            </a:extLst>
+          </p:cNvPr>
+          <p:cNvSpPr txBox="1"/>
+          <p:nvPr/>
+        </p:nvSpPr>
+        <p:spPr>
+          <a:xfrm>
+            <a:off x="6782830" y="4759978"/>
+            <a:ext cx="2724807" cy="400110"/>
+          </a:xfrm>
+          <a:prstGeom prst="rect">
+            <a:avLst/>
+          </a:prstGeom>
+          <a:noFill/>
+        </p:spPr>
+        <p:txBody>
+          <a:bodyPr wrap="square" rtlCol="0">
+            <a:spAutoFit/>
+          </a:bodyPr>
+          <a:lstStyle/>
+          <a:p>
+            <a:r>
+              <a:rPr lang="en-US" sz="2000" dirty="0"/>
+              <a:t>GS gap</a:t>
+            </a:r>
+          </a:p>
+        </p:txBody>
+      </p:sp>
+      <p:cxnSp>
+        <p:nvCxnSpPr>
+          <p:cNvPr id="33" name="Straight Connector 32">
+            <a:extLst>
+              <a:ext uri="{FF2B5EF4-FFF2-40B4-BE49-F238E27FC236}">
+                <a16:creationId xmlns:a16="http://schemas.microsoft.com/office/drawing/2014/main" id="{EA9067A0-5AF5-58CB-771B-7C358EB886D9}"/>
+              </a:ext>
+            </a:extLst>
+          </p:cNvPr>
+          <p:cNvCxnSpPr>
+            <a:cxnSpLocks/>
+          </p:cNvCxnSpPr>
+          <p:nvPr/>
+        </p:nvCxnSpPr>
+        <p:spPr>
+          <a:xfrm>
+            <a:off x="4721220" y="4610896"/>
+            <a:ext cx="1862460" cy="0"/>
+          </a:xfrm>
+          <a:prstGeom prst="line">
+            <a:avLst/>
+          </a:prstGeom>
+          <a:ln w="19050">
+            <a:solidFill>
+              <a:srgbClr val="C00000"/>
+            </a:solidFill>
+            <a:prstDash val="sysDash"/>
+          </a:ln>
+        </p:spPr>
+        <p:style>
+          <a:lnRef idx="2">
+            <a:schemeClr val="accent1"/>
+          </a:lnRef>
+          <a:fillRef idx="0">
+            <a:schemeClr val="accent1"/>
+          </a:fillRef>
+          <a:effectRef idx="1">
+            <a:schemeClr val="accent1"/>
+          </a:effectRef>
+          <a:fontRef idx="minor">
+            <a:schemeClr val="tx1"/>
+          </a:fontRef>
+        </p:style>
+      </p:cxnSp>
+      <p:cxnSp>
+        <p:nvCxnSpPr>
+          <p:cNvPr id="31" name="Straight Connector 30">
+            <a:extLst>
+              <a:ext uri="{FF2B5EF4-FFF2-40B4-BE49-F238E27FC236}">
+                <a16:creationId xmlns:a16="http://schemas.microsoft.com/office/drawing/2014/main" id="{F8EC36C2-33F6-3529-8F86-B531852B6D9A}"/>
+              </a:ext>
+            </a:extLst>
+          </p:cNvPr>
+          <p:cNvCxnSpPr>
+            <a:cxnSpLocks/>
+          </p:cNvCxnSpPr>
+          <p:nvPr/>
+        </p:nvCxnSpPr>
+        <p:spPr>
+          <a:xfrm flipV="1">
+            <a:off x="3841129" y="5374336"/>
+            <a:ext cx="2742551" cy="30666"/>
+          </a:xfrm>
+          <a:prstGeom prst="line">
+            <a:avLst/>
+          </a:prstGeom>
+          <a:ln w="19050">
+            <a:solidFill>
+              <a:srgbClr val="C00000"/>
+            </a:solidFill>
+            <a:prstDash val="sysDash"/>
+          </a:ln>
+        </p:spPr>
+        <p:style>
+          <a:lnRef idx="2">
+            <a:schemeClr val="accent1"/>
+          </a:lnRef>
+          <a:fillRef idx="0">
+            <a:schemeClr val="accent1"/>
+          </a:fillRef>
+          <a:effectRef idx="1">
+            <a:schemeClr val="accent1"/>
+          </a:effectRef>
+          <a:fontRef idx="minor">
+            <a:schemeClr val="tx1"/>
+          </a:fontRef>
+        </p:style>
+      </p:cxnSp>
+      <mc:AlternateContent xmlns:mc="http://schemas.openxmlformats.org/markup-compatibility/2006" xmlns:a14="http://schemas.microsoft.com/office/drawing/2010/main">
+        <mc:Choice Requires="a14">
+          <p:sp>
+            <p:nvSpPr>
+              <p:cNvPr id="55" name="TextBox 54">
+                <a:extLst>
+                  <a:ext uri="{FF2B5EF4-FFF2-40B4-BE49-F238E27FC236}">
+                    <a16:creationId xmlns:a16="http://schemas.microsoft.com/office/drawing/2014/main" id="{A9DBD9E1-25A1-DAEB-5139-52EB721A9425}"/>
+                  </a:ext>
+                </a:extLst>
+              </p:cNvPr>
+              <p:cNvSpPr txBox="1"/>
+              <p:nvPr/>
+            </p:nvSpPr>
+            <p:spPr>
+              <a:xfrm>
+                <a:off x="3104890" y="7464610"/>
+                <a:ext cx="1120139" cy="400110"/>
+              </a:xfrm>
+              <a:prstGeom prst="rect">
+                <a:avLst/>
+              </a:prstGeom>
+              <a:noFill/>
+            </p:spPr>
+            <p:txBody>
+              <a:bodyPr wrap="square" rtlCol="0">
+                <a:spAutoFit/>
+              </a:bodyPr>
+              <a:lstStyle/>
+              <a:p>
+                <a:pPr/>
+                <a14:m>
+                  <m:oMathPara xmlns:m="http://schemas.openxmlformats.org/officeDocument/2006/math">
+                    <m:oMathParaPr>
+                      <m:jc m:val="centerGroup"/>
+                    </m:oMathParaPr>
+                    <m:oMath xmlns:m="http://schemas.openxmlformats.org/officeDocument/2006/math">
+                      <m:r>
+                        <a:rPr lang="en-US" sz="2000" i="1" smtClean="0">
+                          <a:latin typeface="Cambria Math" panose="02040503050406030204" pitchFamily="18" charset="0"/>
+                        </a:rPr>
+                        <m:t>𝐴</m:t>
+                      </m:r>
+                    </m:oMath>
+                  </m:oMathPara>
+                </a14:m>
+                <a:endParaRPr lang="en-US" dirty="0"/>
+              </a:p>
+            </p:txBody>
+          </p:sp>
+        </mc:Choice>
+        <mc:Fallback xmlns="">
+          <p:sp>
+            <p:nvSpPr>
+              <p:cNvPr id="55" name="TextBox 54">
+                <a:extLst>
+                  <a:ext uri="{FF2B5EF4-FFF2-40B4-BE49-F238E27FC236}">
+                    <a16:creationId xmlns:a16="http://schemas.microsoft.com/office/drawing/2014/main" id="{A9DBD9E1-25A1-DAEB-5139-52EB721A9425}"/>
+                  </a:ext>
+                </a:extLst>
+              </p:cNvPr>
+              <p:cNvSpPr txBox="1">
+                <a:spLocks noRot="1" noChangeAspect="1" noMove="1" noResize="1" noEditPoints="1" noAdjustHandles="1" noChangeArrowheads="1" noChangeShapeType="1" noTextEdit="1"/>
+              </p:cNvSpPr>
+              <p:nvPr/>
+            </p:nvSpPr>
+            <p:spPr>
+              <a:xfrm>
+                <a:off x="3104890" y="7464610"/>
+                <a:ext cx="1120139" cy="400110"/>
+              </a:xfrm>
+              <a:prstGeom prst="rect">
+                <a:avLst/>
+              </a:prstGeom>
+              <a:blipFill>
+                <a:blip r:embed="rId4"/>
+                <a:stretch>
+                  <a:fillRect/>
+                </a:stretch>
+              </a:blipFill>
+            </p:spPr>
+            <p:txBody>
+              <a:bodyPr/>
+              <a:lstStyle/>
+              <a:p>
+                <a:r>
+                  <a:rPr lang="en-US">
+                    <a:noFill/>
+                  </a:rPr>
+                  <a:t> </a:t>
+                </a:r>
+              </a:p>
+            </p:txBody>
+          </p:sp>
+        </mc:Fallback>
+      </mc:AlternateContent>
+      <mc:AlternateContent xmlns:mc="http://schemas.openxmlformats.org/markup-compatibility/2006" xmlns:a14="http://schemas.microsoft.com/office/drawing/2010/main">
+        <mc:Choice Requires="a14">
+          <p:sp>
+            <p:nvSpPr>
+              <p:cNvPr id="56" name="TextBox 55">
+                <a:extLst>
+                  <a:ext uri="{FF2B5EF4-FFF2-40B4-BE49-F238E27FC236}">
+                    <a16:creationId xmlns:a16="http://schemas.microsoft.com/office/drawing/2014/main" id="{FE2EBA49-E7B5-0BAE-F627-AD513C49AB77}"/>
+                  </a:ext>
+                </a:extLst>
+              </p:cNvPr>
+              <p:cNvSpPr txBox="1"/>
+              <p:nvPr/>
+            </p:nvSpPr>
+            <p:spPr>
+              <a:xfrm>
+                <a:off x="4614724" y="7505967"/>
+                <a:ext cx="1120139" cy="369332"/>
+              </a:xfrm>
+              <a:prstGeom prst="rect">
+                <a:avLst/>
+              </a:prstGeom>
+              <a:noFill/>
+            </p:spPr>
+            <p:txBody>
+              <a:bodyPr wrap="square" rtlCol="0">
+                <a:spAutoFit/>
+              </a:bodyPr>
+              <a:lstStyle/>
+              <a:p>
+                <a:pPr/>
+                <a14:m>
+                  <m:oMathPara xmlns:m="http://schemas.openxmlformats.org/officeDocument/2006/math">
+                    <m:oMathParaPr>
+                      <m:jc m:val="centerGroup"/>
+                    </m:oMathParaPr>
+                    <m:oMath xmlns:m="http://schemas.openxmlformats.org/officeDocument/2006/math">
+                      <m:r>
+                        <a:rPr lang="en-US" b="0" i="1" smtClean="0">
+                          <a:latin typeface="Cambria Math" panose="02040503050406030204" pitchFamily="18" charset="0"/>
+                        </a:rPr>
+                        <m:t>𝐵</m:t>
+                      </m:r>
+                    </m:oMath>
+                  </m:oMathPara>
+                </a14:m>
+                <a:endParaRPr lang="en-US" dirty="0"/>
+              </a:p>
+            </p:txBody>
+          </p:sp>
+        </mc:Choice>
+        <mc:Fallback xmlns="">
+          <p:sp>
+            <p:nvSpPr>
+              <p:cNvPr id="56" name="TextBox 55">
+                <a:extLst>
+                  <a:ext uri="{FF2B5EF4-FFF2-40B4-BE49-F238E27FC236}">
+                    <a16:creationId xmlns:a16="http://schemas.microsoft.com/office/drawing/2014/main" id="{FE2EBA49-E7B5-0BAE-F627-AD513C49AB77}"/>
+                  </a:ext>
+                </a:extLst>
+              </p:cNvPr>
+              <p:cNvSpPr txBox="1">
+                <a:spLocks noRot="1" noChangeAspect="1" noMove="1" noResize="1" noEditPoints="1" noAdjustHandles="1" noChangeArrowheads="1" noChangeShapeType="1" noTextEdit="1"/>
+              </p:cNvSpPr>
+              <p:nvPr/>
+            </p:nvSpPr>
+            <p:spPr>
+              <a:xfrm>
+                <a:off x="4614724" y="7505967"/>
+                <a:ext cx="1120139" cy="369332"/>
+              </a:xfrm>
+              <a:prstGeom prst="rect">
+                <a:avLst/>
+              </a:prstGeom>
+              <a:blipFill>
+                <a:blip r:embed="rId5"/>
+                <a:stretch>
+                  <a:fillRect/>
+                </a:stretch>
+              </a:blipFill>
+            </p:spPr>
+            <p:txBody>
+              <a:bodyPr/>
+              <a:lstStyle/>
+              <a:p>
+                <a:r>
+                  <a:rPr lang="en-US">
+                    <a:noFill/>
+                  </a:rPr>
+                  <a:t> </a:t>
+                </a:r>
+              </a:p>
+            </p:txBody>
+          </p:sp>
+        </mc:Fallback>
+      </mc:AlternateContent>
+      <mc:AlternateContent xmlns:mc="http://schemas.openxmlformats.org/markup-compatibility/2006" xmlns:a14="http://schemas.microsoft.com/office/drawing/2010/main">
+        <mc:Choice Requires="a14">
+          <p:sp>
+            <p:nvSpPr>
+              <p:cNvPr id="57" name="TextBox 56">
+                <a:extLst>
+                  <a:ext uri="{FF2B5EF4-FFF2-40B4-BE49-F238E27FC236}">
+                    <a16:creationId xmlns:a16="http://schemas.microsoft.com/office/drawing/2014/main" id="{EF151774-A453-BED4-CDC6-18AF160308C1}"/>
+                  </a:ext>
+                </a:extLst>
+              </p:cNvPr>
+              <p:cNvSpPr txBox="1"/>
+              <p:nvPr/>
+            </p:nvSpPr>
+            <p:spPr>
+              <a:xfrm>
+                <a:off x="5584144" y="7478107"/>
+                <a:ext cx="1120139" cy="369332"/>
+              </a:xfrm>
+              <a:prstGeom prst="rect">
+                <a:avLst/>
+              </a:prstGeom>
+              <a:noFill/>
+            </p:spPr>
+            <p:txBody>
+              <a:bodyPr wrap="square" rtlCol="0">
+                <a:spAutoFit/>
+              </a:bodyPr>
+              <a:lstStyle/>
+              <a:p>
+                <a:pPr/>
+                <a14:m>
+                  <m:oMathPara xmlns:m="http://schemas.openxmlformats.org/officeDocument/2006/math">
+                    <m:oMathParaPr>
+                      <m:jc m:val="centerGroup"/>
+                    </m:oMathParaPr>
+                    <m:oMath xmlns:m="http://schemas.openxmlformats.org/officeDocument/2006/math">
+                      <m:r>
+                        <a:rPr lang="en-US" b="0" i="1" smtClean="0">
+                          <a:latin typeface="Cambria Math" panose="02040503050406030204" pitchFamily="18" charset="0"/>
+                        </a:rPr>
+                        <m:t>𝐶</m:t>
+                      </m:r>
+                    </m:oMath>
+                  </m:oMathPara>
+                </a14:m>
+                <a:endParaRPr lang="en-US" dirty="0"/>
+              </a:p>
+            </p:txBody>
+          </p:sp>
+        </mc:Choice>
+        <mc:Fallback xmlns="">
+          <p:sp>
+            <p:nvSpPr>
+              <p:cNvPr id="57" name="TextBox 56">
+                <a:extLst>
+                  <a:ext uri="{FF2B5EF4-FFF2-40B4-BE49-F238E27FC236}">
+                    <a16:creationId xmlns:a16="http://schemas.microsoft.com/office/drawing/2014/main" id="{EF151774-A453-BED4-CDC6-18AF160308C1}"/>
+                  </a:ext>
+                </a:extLst>
+              </p:cNvPr>
+              <p:cNvSpPr txBox="1">
+                <a:spLocks noRot="1" noChangeAspect="1" noMove="1" noResize="1" noEditPoints="1" noAdjustHandles="1" noChangeArrowheads="1" noChangeShapeType="1" noTextEdit="1"/>
+              </p:cNvSpPr>
+              <p:nvPr/>
+            </p:nvSpPr>
+            <p:spPr>
+              <a:xfrm>
+                <a:off x="5584144" y="7478107"/>
+                <a:ext cx="1120139" cy="369332"/>
+              </a:xfrm>
+              <a:prstGeom prst="rect">
+                <a:avLst/>
+              </a:prstGeom>
+              <a:blipFill>
+                <a:blip r:embed="rId6"/>
+                <a:stretch>
+                  <a:fillRect/>
+                </a:stretch>
+              </a:blipFill>
+            </p:spPr>
+            <p:txBody>
+              <a:bodyPr/>
+              <a:lstStyle/>
+              <a:p>
+                <a:r>
+                  <a:rPr lang="en-US">
+                    <a:noFill/>
+                  </a:rPr>
+                  <a:t> </a:t>
+                </a:r>
+              </a:p>
+            </p:txBody>
+          </p:sp>
+        </mc:Fallback>
+      </mc:AlternateContent>
+      <mc:AlternateContent xmlns:mc="http://schemas.openxmlformats.org/markup-compatibility/2006" xmlns:a14="http://schemas.microsoft.com/office/drawing/2010/main">
+        <mc:Choice Requires="a14">
+          <p:sp>
+            <p:nvSpPr>
+              <p:cNvPr id="58" name="TextBox 57">
+                <a:extLst>
+                  <a:ext uri="{FF2B5EF4-FFF2-40B4-BE49-F238E27FC236}">
+                    <a16:creationId xmlns:a16="http://schemas.microsoft.com/office/drawing/2014/main" id="{4A0B7C25-A3C2-CB15-81E8-5775364F6217}"/>
+                  </a:ext>
+                </a:extLst>
+              </p:cNvPr>
+              <p:cNvSpPr txBox="1"/>
+              <p:nvPr/>
+            </p:nvSpPr>
+            <p:spPr>
+              <a:xfrm>
+                <a:off x="6385963" y="7484417"/>
+                <a:ext cx="1120139" cy="369332"/>
+              </a:xfrm>
+              <a:prstGeom prst="rect">
+                <a:avLst/>
+              </a:prstGeom>
+              <a:noFill/>
+            </p:spPr>
+            <p:txBody>
+              <a:bodyPr wrap="square" rtlCol="0">
+                <a:spAutoFit/>
+              </a:bodyPr>
+              <a:lstStyle/>
+              <a:p>
+                <a:pPr/>
+                <a14:m>
+                  <m:oMathPara xmlns:m="http://schemas.openxmlformats.org/officeDocument/2006/math">
+                    <m:oMathParaPr>
+                      <m:jc m:val="centerGroup"/>
+                    </m:oMathParaPr>
+                    <m:oMath xmlns:m="http://schemas.openxmlformats.org/officeDocument/2006/math">
+                      <m:r>
+                        <a:rPr lang="en-US" b="0" i="1" smtClean="0">
+                          <a:latin typeface="Cambria Math" panose="02040503050406030204" pitchFamily="18" charset="0"/>
+                        </a:rPr>
+                        <m:t>𝐷</m:t>
+                      </m:r>
+                    </m:oMath>
+                  </m:oMathPara>
+                </a14:m>
+                <a:endParaRPr lang="en-US" dirty="0"/>
+              </a:p>
+            </p:txBody>
+          </p:sp>
+        </mc:Choice>
+        <mc:Fallback xmlns="">
+          <p:sp>
+            <p:nvSpPr>
+              <p:cNvPr id="58" name="TextBox 57">
+                <a:extLst>
+                  <a:ext uri="{FF2B5EF4-FFF2-40B4-BE49-F238E27FC236}">
+                    <a16:creationId xmlns:a16="http://schemas.microsoft.com/office/drawing/2014/main" id="{4A0B7C25-A3C2-CB15-81E8-5775364F6217}"/>
+                  </a:ext>
+                </a:extLst>
+              </p:cNvPr>
+              <p:cNvSpPr txBox="1">
+                <a:spLocks noRot="1" noChangeAspect="1" noMove="1" noResize="1" noEditPoints="1" noAdjustHandles="1" noChangeArrowheads="1" noChangeShapeType="1" noTextEdit="1"/>
+              </p:cNvSpPr>
+              <p:nvPr/>
+            </p:nvSpPr>
+            <p:spPr>
+              <a:xfrm>
+                <a:off x="6385963" y="7484417"/>
+                <a:ext cx="1120139" cy="369332"/>
+              </a:xfrm>
+              <a:prstGeom prst="rect">
+                <a:avLst/>
+              </a:prstGeom>
+              <a:blipFill>
+                <a:blip r:embed="rId7"/>
+                <a:stretch>
+                  <a:fillRect/>
+                </a:stretch>
+              </a:blipFill>
+            </p:spPr>
+            <p:txBody>
+              <a:bodyPr/>
+              <a:lstStyle/>
+              <a:p>
+                <a:r>
+                  <a:rPr lang="en-US">
+                    <a:noFill/>
+                  </a:rPr>
+                  <a:t> </a:t>
+                </a:r>
+              </a:p>
+            </p:txBody>
+          </p:sp>
+        </mc:Fallback>
+      </mc:AlternateContent>
+    </p:spTree>
+    <p:extLst>
+      <p:ext uri="{BB962C8B-B14F-4D97-AF65-F5344CB8AC3E}">
+        <p14:creationId xmlns:p14="http://schemas.microsoft.com/office/powerpoint/2010/main" val="72096799"/>
+      </p:ext>
+    </p:extLst>
+  </p:cSld>
+  <p:clrMapOvr>
+    <a:masterClrMapping/>
+  </p:clrMapOvr>
+</p:sld>
+</file>
+
+<file path=ppt/slides/slide11.xml><?xml version="1.0" encoding="utf-8"?>
+<p:sld xmlns:a="http://schemas.openxmlformats.org/drawingml/2006/main" xmlns:r="http://schemas.openxmlformats.org/officeDocument/2006/relationships" xmlns:p="http://schemas.openxmlformats.org/presentationml/2006/main">
+  <p:cSld>
+    <p:spTree>
+      <p:nvGrpSpPr>
+        <p:cNvPr id="1" name=""/>
+        <p:cNvGrpSpPr/>
+        <p:nvPr/>
+      </p:nvGrpSpPr>
+      <p:grpSpPr>
+        <a:xfrm>
+          <a:off x="0" y="0"/>
+          <a:ext cx="0" cy="0"/>
+          <a:chOff x="0" y="0"/>
+          <a:chExt cx="0" cy="0"/>
+        </a:xfrm>
+      </p:grpSpPr>
+      <p:pic>
+        <p:nvPicPr>
           <p:cNvPr id="4" name="Picture 3">
             <a:extLst>
               <a:ext uri="{FF2B5EF4-FFF2-40B4-BE49-F238E27FC236}">
@@ -9016,7 +11058,7 @@
 </p:sld>
 </file>
 
-<file path=ppt/slides/slide11.xml><?xml version="1.0" encoding="utf-8"?>
+<file path=ppt/slides/slide12.xml><?xml version="1.0" encoding="utf-8"?>
 <p:sld xmlns:a="http://schemas.openxmlformats.org/drawingml/2006/main" xmlns:r="http://schemas.openxmlformats.org/officeDocument/2006/relationships" xmlns:p="http://schemas.openxmlformats.org/presentationml/2006/main">
   <p:cSld>
     <p:spTree>
@@ -13257,7 +15299,7 @@
 </p:sld>
 </file>
 
-<file path=ppt/slides/slide12.xml><?xml version="1.0" encoding="utf-8"?>
+<file path=ppt/slides/slide13.xml><?xml version="1.0" encoding="utf-8"?>
 <p:sld xmlns:a="http://schemas.openxmlformats.org/drawingml/2006/main" xmlns:r="http://schemas.openxmlformats.org/officeDocument/2006/relationships" xmlns:p="http://schemas.openxmlformats.org/presentationml/2006/main">
   <p:cSld>
     <p:spTree>
@@ -17350,7 +19392,7 @@
 </p:sld>
 </file>
 
-<file path=ppt/slides/slide13.xml><?xml version="1.0" encoding="utf-8"?>
+<file path=ppt/slides/slide14.xml><?xml version="1.0" encoding="utf-8"?>
 <p:sld xmlns:a="http://schemas.openxmlformats.org/drawingml/2006/main" xmlns:r="http://schemas.openxmlformats.org/officeDocument/2006/relationships" xmlns:p="http://schemas.openxmlformats.org/presentationml/2006/main">
   <p:cSld>
     <p:spTree>
@@ -17410,7 +19452,7 @@
 </p:sld>
 </file>
 
-<file path=ppt/slides/slide14.xml><?xml version="1.0" encoding="utf-8"?>
+<file path=ppt/slides/slide15.xml><?xml version="1.0" encoding="utf-8"?>
 <p:sld xmlns:a="http://schemas.openxmlformats.org/drawingml/2006/main" xmlns:r="http://schemas.openxmlformats.org/officeDocument/2006/relationships" xmlns:p="http://schemas.openxmlformats.org/presentationml/2006/main">
   <p:cSld>
     <p:spTree>
@@ -17478,7 +19520,7 @@
           <a:p>
             <a:fld id="{46A71D82-A181-2444-837A-D02C6E596E2D}" type="slidenum">
               <a:rPr lang="en-US" smtClean="0"/>
-              <a:t>14</a:t>
+              <a:t>15</a:t>
             </a:fld>
             <a:endParaRPr lang="en-US"/>
           </a:p>
@@ -20063,6 +22105,190 @@
 </file>
 
 <file path=ppt/slides/slide2.xml><?xml version="1.0" encoding="utf-8"?>
+<p:sld xmlns:a="http://schemas.openxmlformats.org/drawingml/2006/main" xmlns:r="http://schemas.openxmlformats.org/officeDocument/2006/relationships" xmlns:p="http://schemas.openxmlformats.org/presentationml/2006/main">
+  <p:cSld>
+    <p:spTree>
+      <p:nvGrpSpPr>
+        <p:cNvPr id="1" name=""/>
+        <p:cNvGrpSpPr/>
+        <p:nvPr/>
+      </p:nvGrpSpPr>
+      <p:grpSpPr>
+        <a:xfrm>
+          <a:off x="0" y="0"/>
+          <a:ext cx="0" cy="0"/>
+          <a:chOff x="0" y="0"/>
+          <a:chExt cx="0" cy="0"/>
+        </a:xfrm>
+      </p:grpSpPr>
+      <p:pic>
+        <p:nvPicPr>
+          <p:cNvPr id="4" name="Picture 3">
+            <a:extLst>
+              <a:ext uri="{FF2B5EF4-FFF2-40B4-BE49-F238E27FC236}">
+                <a16:creationId xmlns:a16="http://schemas.microsoft.com/office/drawing/2014/main" id="{6BF00595-96FE-DBA4-AF7B-727AF051C6DB}"/>
+              </a:ext>
+            </a:extLst>
+          </p:cNvPr>
+          <p:cNvPicPr>
+            <a:picLocks noChangeAspect="1"/>
+          </p:cNvPicPr>
+          <p:nvPr/>
+        </p:nvPicPr>
+        <p:blipFill>
+          <a:blip r:embed="rId3"/>
+          <a:stretch>
+            <a:fillRect/>
+          </a:stretch>
+        </p:blipFill>
+        <p:spPr>
+          <a:xfrm>
+            <a:off x="670559" y="549308"/>
+            <a:ext cx="16988715" cy="12648532"/>
+          </a:xfrm>
+          <a:prstGeom prst="rect">
+            <a:avLst/>
+          </a:prstGeom>
+        </p:spPr>
+      </p:pic>
+      <p:pic>
+        <p:nvPicPr>
+          <p:cNvPr id="5" name="Picture 4">
+            <a:extLst>
+              <a:ext uri="{FF2B5EF4-FFF2-40B4-BE49-F238E27FC236}">
+                <a16:creationId xmlns:a16="http://schemas.microsoft.com/office/drawing/2014/main" id="{0441180A-06AD-5E23-6127-723BE3632DA6}"/>
+              </a:ext>
+            </a:extLst>
+          </p:cNvPr>
+          <p:cNvPicPr>
+            <a:picLocks noChangeAspect="1"/>
+          </p:cNvPicPr>
+          <p:nvPr/>
+        </p:nvPicPr>
+        <p:blipFill>
+          <a:blip r:embed="rId4"/>
+          <a:srcRect l="23456" t="6556" r="29896" b="19333"/>
+          <a:stretch>
+            <a:fillRect/>
+          </a:stretch>
+        </p:blipFill>
+        <p:spPr>
+          <a:xfrm>
+            <a:off x="14511775" y="9115693"/>
+            <a:ext cx="2647336" cy="3291621"/>
+          </a:xfrm>
+          <a:prstGeom prst="rect">
+            <a:avLst/>
+          </a:prstGeom>
+        </p:spPr>
+      </p:pic>
+      <p:pic>
+        <p:nvPicPr>
+          <p:cNvPr id="6" name="Picture 5">
+            <a:extLst>
+              <a:ext uri="{FF2B5EF4-FFF2-40B4-BE49-F238E27FC236}">
+                <a16:creationId xmlns:a16="http://schemas.microsoft.com/office/drawing/2014/main" id="{5DEE88C9-9127-C60D-A156-F4BF3399B9FA}"/>
+              </a:ext>
+            </a:extLst>
+          </p:cNvPr>
+          <p:cNvPicPr>
+            <a:picLocks noChangeAspect="1"/>
+          </p:cNvPicPr>
+          <p:nvPr/>
+        </p:nvPicPr>
+        <p:blipFill>
+          <a:blip r:embed="rId5"/>
+          <a:srcRect l="33283" t="6044" r="8615" b="20199"/>
+          <a:stretch>
+            <a:fillRect/>
+          </a:stretch>
+        </p:blipFill>
+        <p:spPr>
+          <a:xfrm>
+            <a:off x="8083824" y="9093018"/>
+            <a:ext cx="2915480" cy="3314296"/>
+          </a:xfrm>
+          <a:prstGeom prst="rect">
+            <a:avLst/>
+          </a:prstGeom>
+        </p:spPr>
+      </p:pic>
+      <p:pic>
+        <p:nvPicPr>
+          <p:cNvPr id="7" name="Picture 6">
+            <a:extLst>
+              <a:ext uri="{FF2B5EF4-FFF2-40B4-BE49-F238E27FC236}">
+                <a16:creationId xmlns:a16="http://schemas.microsoft.com/office/drawing/2014/main" id="{F44E9CB6-36D6-AD41-3B74-90F824BDDAC0}"/>
+              </a:ext>
+            </a:extLst>
+          </p:cNvPr>
+          <p:cNvPicPr>
+            <a:picLocks noChangeAspect="1"/>
+          </p:cNvPicPr>
+          <p:nvPr/>
+        </p:nvPicPr>
+        <p:blipFill>
+          <a:blip r:embed="rId6"/>
+          <a:srcRect l="73901" t="15399" r="17998" b="75560"/>
+          <a:stretch>
+            <a:fillRect/>
+          </a:stretch>
+        </p:blipFill>
+        <p:spPr>
+          <a:xfrm>
+            <a:off x="11471483" y="9335911"/>
+            <a:ext cx="504074" cy="440267"/>
+          </a:xfrm>
+          <a:prstGeom prst="rect">
+            <a:avLst/>
+          </a:prstGeom>
+        </p:spPr>
+      </p:pic>
+      <p:pic>
+        <p:nvPicPr>
+          <p:cNvPr id="8" name="Picture 7">
+            <a:extLst>
+              <a:ext uri="{FF2B5EF4-FFF2-40B4-BE49-F238E27FC236}">
+                <a16:creationId xmlns:a16="http://schemas.microsoft.com/office/drawing/2014/main" id="{6B381657-1422-205C-0907-54EAE678576A}"/>
+              </a:ext>
+            </a:extLst>
+          </p:cNvPr>
+          <p:cNvPicPr>
+            <a:picLocks noChangeAspect="1"/>
+          </p:cNvPicPr>
+          <p:nvPr/>
+        </p:nvPicPr>
+        <p:blipFill>
+          <a:blip r:embed="rId6"/>
+          <a:srcRect l="73901" t="25483" r="18964" b="65475"/>
+          <a:stretch>
+            <a:fillRect/>
+          </a:stretch>
+        </p:blipFill>
+        <p:spPr>
+          <a:xfrm>
+            <a:off x="11501550" y="10092266"/>
+            <a:ext cx="443940" cy="440267"/>
+          </a:xfrm>
+          <a:prstGeom prst="rect">
+            <a:avLst/>
+          </a:prstGeom>
+        </p:spPr>
+      </p:pic>
+    </p:spTree>
+    <p:extLst>
+      <p:ext uri="{BB962C8B-B14F-4D97-AF65-F5344CB8AC3E}">
+        <p14:creationId xmlns:p14="http://schemas.microsoft.com/office/powerpoint/2010/main" val="3710818168"/>
+      </p:ext>
+    </p:extLst>
+  </p:cSld>
+  <p:clrMapOvr>
+    <a:masterClrMapping/>
+  </p:clrMapOvr>
+</p:sld>
+</file>
+
+<file path=ppt/slides/slide3.xml><?xml version="1.0" encoding="utf-8"?>
 <p:sld xmlns:a="http://schemas.openxmlformats.org/drawingml/2006/main" xmlns:r="http://schemas.openxmlformats.org/officeDocument/2006/relationships" xmlns:p="http://schemas.openxmlformats.org/presentationml/2006/main">
   <p:cSld>
     <p:spTree>
@@ -23159,8 +25385,8 @@
           </a:fontRef>
         </p:style>
       </p:cxnSp>
-      <mc:AlternateContent xmlns:mc="http://schemas.openxmlformats.org/markup-compatibility/2006">
-        <mc:Choice xmlns:a14="http://schemas.microsoft.com/office/drawing/2010/main" Requires="a14">
+      <mc:AlternateContent xmlns:mc="http://schemas.openxmlformats.org/markup-compatibility/2006" xmlns:a14="http://schemas.microsoft.com/office/drawing/2010/main">
+        <mc:Choice Requires="a14">
           <p:sp>
             <p:nvSpPr>
               <p:cNvPr id="64" name="TextBox 63">
@@ -23210,7 +25436,7 @@
             </p:txBody>
           </p:sp>
         </mc:Choice>
-        <mc:Fallback>
+        <mc:Fallback xmlns="">
           <p:sp>
             <p:nvSpPr>
               <p:cNvPr id="64" name="TextBox 63">
@@ -23255,8 +25481,8 @@
           </p:sp>
         </mc:Fallback>
       </mc:AlternateContent>
-      <mc:AlternateContent xmlns:mc="http://schemas.openxmlformats.org/markup-compatibility/2006">
-        <mc:Choice xmlns:a14="http://schemas.microsoft.com/office/drawing/2010/main" Requires="a14">
+      <mc:AlternateContent xmlns:mc="http://schemas.openxmlformats.org/markup-compatibility/2006" xmlns:a14="http://schemas.microsoft.com/office/drawing/2010/main">
+        <mc:Choice Requires="a14">
           <p:sp>
             <p:nvSpPr>
               <p:cNvPr id="65" name="TextBox 64">
@@ -23306,7 +25532,7 @@
             </p:txBody>
           </p:sp>
         </mc:Choice>
-        <mc:Fallback>
+        <mc:Fallback xmlns="">
           <p:sp>
             <p:nvSpPr>
               <p:cNvPr id="65" name="TextBox 64">
@@ -23351,8 +25577,8 @@
           </p:sp>
         </mc:Fallback>
       </mc:AlternateContent>
-      <mc:AlternateContent xmlns:mc="http://schemas.openxmlformats.org/markup-compatibility/2006">
-        <mc:Choice xmlns:a14="http://schemas.microsoft.com/office/drawing/2010/main" Requires="a14">
+      <mc:AlternateContent xmlns:mc="http://schemas.openxmlformats.org/markup-compatibility/2006" xmlns:a14="http://schemas.microsoft.com/office/drawing/2010/main">
+        <mc:Choice Requires="a14">
           <p:sp>
             <p:nvSpPr>
               <p:cNvPr id="66" name="TextBox 65">
@@ -23402,7 +25628,7 @@
             </p:txBody>
           </p:sp>
         </mc:Choice>
-        <mc:Fallback>
+        <mc:Fallback xmlns="">
           <p:sp>
             <p:nvSpPr>
               <p:cNvPr id="66" name="TextBox 65">
@@ -23447,8 +25673,8 @@
           </p:sp>
         </mc:Fallback>
       </mc:AlternateContent>
-      <mc:AlternateContent xmlns:mc="http://schemas.openxmlformats.org/markup-compatibility/2006">
-        <mc:Choice xmlns:a14="http://schemas.microsoft.com/office/drawing/2010/main" Requires="a14">
+      <mc:AlternateContent xmlns:mc="http://schemas.openxmlformats.org/markup-compatibility/2006" xmlns:a14="http://schemas.microsoft.com/office/drawing/2010/main">
+        <mc:Choice Requires="a14">
           <p:sp>
             <p:nvSpPr>
               <p:cNvPr id="67" name="TextBox 66">
@@ -23498,7 +25724,7 @@
             </p:txBody>
           </p:sp>
         </mc:Choice>
-        <mc:Fallback>
+        <mc:Fallback xmlns="">
           <p:sp>
             <p:nvSpPr>
               <p:cNvPr id="67" name="TextBox 66">
@@ -23624,7 +25850,7 @@
 </p:sld>
 </file>
 
-<file path=ppt/slides/slide3.xml><?xml version="1.0" encoding="utf-8"?>
+<file path=ppt/slides/slide4.xml><?xml version="1.0" encoding="utf-8"?>
 <p:sld xmlns:a="http://schemas.openxmlformats.org/drawingml/2006/main" xmlns:r="http://schemas.openxmlformats.org/officeDocument/2006/relationships" xmlns:p="http://schemas.openxmlformats.org/presentationml/2006/main">
   <p:cSld>
     <p:spTree>
@@ -27568,7 +29794,7 @@
 </p:sld>
 </file>
 
-<file path=ppt/slides/slide4.xml><?xml version="1.0" encoding="utf-8"?>
+<file path=ppt/slides/slide5.xml><?xml version="1.0" encoding="utf-8"?>
 <p:sld xmlns:a="http://schemas.openxmlformats.org/drawingml/2006/main" xmlns:r="http://schemas.openxmlformats.org/officeDocument/2006/relationships" xmlns:p="http://schemas.openxmlformats.org/presentationml/2006/main">
   <p:cSld>
     <p:spTree>
@@ -27788,7 +30014,7 @@
 </p:sld>
 </file>
 
-<file path=ppt/slides/slide5.xml><?xml version="1.0" encoding="utf-8"?>
+<file path=ppt/slides/slide6.xml><?xml version="1.0" encoding="utf-8"?>
 <p:sld xmlns:a="http://schemas.openxmlformats.org/drawingml/2006/main" xmlns:r="http://schemas.openxmlformats.org/officeDocument/2006/relationships" xmlns:p="http://schemas.openxmlformats.org/presentationml/2006/main">
   <p:cSld>
     <p:spTree>
@@ -28012,7 +30238,7 @@
 </p:sld>
 </file>
 
-<file path=ppt/slides/slide6.xml><?xml version="1.0" encoding="utf-8"?>
+<file path=ppt/slides/slide7.xml><?xml version="1.0" encoding="utf-8"?>
 <p:sld xmlns:a="http://schemas.openxmlformats.org/drawingml/2006/main" xmlns:r="http://schemas.openxmlformats.org/officeDocument/2006/relationships" xmlns:p="http://schemas.openxmlformats.org/presentationml/2006/main">
   <p:cSld>
     <p:spTree>
@@ -28172,7 +30398,7 @@
 </p:sld>
 </file>
 
-<file path=ppt/slides/slide7.xml><?xml version="1.0" encoding="utf-8"?>
+<file path=ppt/slides/slide8.xml><?xml version="1.0" encoding="utf-8"?>
 <p:sld xmlns:a="http://schemas.openxmlformats.org/drawingml/2006/main" xmlns:r="http://schemas.openxmlformats.org/officeDocument/2006/relationships" xmlns:p="http://schemas.openxmlformats.org/presentationml/2006/main">
   <p:cSld>
     <p:spTree>
@@ -28331,7 +30557,7 @@
 </p:sld>
 </file>
 
-<file path=ppt/slides/slide8.xml><?xml version="1.0" encoding="utf-8"?>
+<file path=ppt/slides/slide9.xml><?xml version="1.0" encoding="utf-8"?>
 <p:sld xmlns:a="http://schemas.openxmlformats.org/drawingml/2006/main" xmlns:r="http://schemas.openxmlformats.org/officeDocument/2006/relationships" xmlns:p="http://schemas.openxmlformats.org/presentationml/2006/main">
   <p:cSld>
     <p:spTree>
@@ -28509,1963 +30735,6 @@
     <p:extLst>
       <p:ext uri="{BB962C8B-B14F-4D97-AF65-F5344CB8AC3E}">
         <p14:creationId xmlns:p14="http://schemas.microsoft.com/office/powerpoint/2010/main" val="2419421258"/>
-      </p:ext>
-    </p:extLst>
-  </p:cSld>
-  <p:clrMapOvr>
-    <a:masterClrMapping/>
-  </p:clrMapOvr>
-</p:sld>
-</file>
-
-<file path=ppt/slides/slide9.xml><?xml version="1.0" encoding="utf-8"?>
-<p:sld xmlns:a="http://schemas.openxmlformats.org/drawingml/2006/main" xmlns:r="http://schemas.openxmlformats.org/officeDocument/2006/relationships" xmlns:p="http://schemas.openxmlformats.org/presentationml/2006/main">
-  <p:cSld>
-    <p:spTree>
-      <p:nvGrpSpPr>
-        <p:cNvPr id="1" name=""/>
-        <p:cNvGrpSpPr/>
-        <p:nvPr/>
-      </p:nvGrpSpPr>
-      <p:grpSpPr>
-        <a:xfrm>
-          <a:off x="0" y="0"/>
-          <a:ext cx="0" cy="0"/>
-          <a:chOff x="0" y="0"/>
-          <a:chExt cx="0" cy="0"/>
-        </a:xfrm>
-      </p:grpSpPr>
-      <p:pic>
-        <p:nvPicPr>
-          <p:cNvPr id="46" name="Picture 45" descr="A picture containing line, diagram, design&#10;&#10;Description automatically generated">
-            <a:extLst>
-              <a:ext uri="{FF2B5EF4-FFF2-40B4-BE49-F238E27FC236}">
-                <a16:creationId xmlns:a16="http://schemas.microsoft.com/office/drawing/2014/main" id="{FBB4A572-62A4-9FD2-35E2-857EF3D73B4B}"/>
-              </a:ext>
-            </a:extLst>
-          </p:cNvPr>
-          <p:cNvPicPr>
-            <a:picLocks noChangeAspect="1"/>
-          </p:cNvPicPr>
-          <p:nvPr/>
-        </p:nvPicPr>
-        <p:blipFill>
-          <a:blip r:embed="rId2">
-            <a:extLst>
-              <a:ext uri="{28A0092B-C50C-407E-A947-70E740481C1C}">
-                <a14:useLocalDpi xmlns:a14="http://schemas.microsoft.com/office/drawing/2010/main" val="0"/>
-              </a:ext>
-            </a:extLst>
-          </a:blip>
-          <a:stretch>
-            <a:fillRect/>
-          </a:stretch>
-        </p:blipFill>
-        <p:spPr>
-          <a:xfrm>
-            <a:off x="3062122" y="3903551"/>
-            <a:ext cx="4339242" cy="3749105"/>
-          </a:xfrm>
-          <a:prstGeom prst="rect">
-            <a:avLst/>
-          </a:prstGeom>
-        </p:spPr>
-      </p:pic>
-      <p:sp>
-        <p:nvSpPr>
-          <p:cNvPr id="2" name="Rectangle 1">
-            <a:extLst>
-              <a:ext uri="{FF2B5EF4-FFF2-40B4-BE49-F238E27FC236}">
-                <a16:creationId xmlns:a16="http://schemas.microsoft.com/office/drawing/2014/main" id="{772E8914-CDF0-FA18-C916-5ACA7E1C0274}"/>
-              </a:ext>
-            </a:extLst>
-          </p:cNvPr>
-          <p:cNvSpPr/>
-          <p:nvPr/>
-        </p:nvSpPr>
-        <p:spPr>
-          <a:xfrm>
-            <a:off x="12952289" y="5464400"/>
-            <a:ext cx="270276" cy="182881"/>
-          </a:xfrm>
-          <a:prstGeom prst="rect">
-            <a:avLst/>
-          </a:prstGeom>
-          <a:solidFill>
-            <a:schemeClr val="bg1"/>
-          </a:solidFill>
-          <a:ln>
-            <a:solidFill>
-              <a:schemeClr val="bg1"/>
-            </a:solidFill>
-          </a:ln>
-        </p:spPr>
-        <p:style>
-          <a:lnRef idx="2">
-            <a:schemeClr val="accent1">
-              <a:shade val="15000"/>
-            </a:schemeClr>
-          </a:lnRef>
-          <a:fillRef idx="1">
-            <a:schemeClr val="accent1"/>
-          </a:fillRef>
-          <a:effectRef idx="0">
-            <a:schemeClr val="accent1"/>
-          </a:effectRef>
-          <a:fontRef idx="minor">
-            <a:schemeClr val="lt1"/>
-          </a:fontRef>
-        </p:style>
-        <p:txBody>
-          <a:bodyPr rtlCol="0" anchor="ctr"/>
-          <a:lstStyle/>
-          <a:p>
-            <a:pPr algn="ctr"/>
-            <a:endParaRPr lang="en-US"/>
-          </a:p>
-        </p:txBody>
-      </p:sp>
-      <p:sp>
-        <p:nvSpPr>
-          <p:cNvPr id="3" name="Rectangle 2">
-            <a:extLst>
-              <a:ext uri="{FF2B5EF4-FFF2-40B4-BE49-F238E27FC236}">
-                <a16:creationId xmlns:a16="http://schemas.microsoft.com/office/drawing/2014/main" id="{778238F8-C915-F5DD-EF24-9CA0A3422FBB}"/>
-              </a:ext>
-            </a:extLst>
-          </p:cNvPr>
-          <p:cNvSpPr/>
-          <p:nvPr/>
-        </p:nvSpPr>
-        <p:spPr>
-          <a:xfrm>
-            <a:off x="5345538" y="4373510"/>
-            <a:ext cx="270276" cy="182881"/>
-          </a:xfrm>
-          <a:prstGeom prst="rect">
-            <a:avLst/>
-          </a:prstGeom>
-          <a:solidFill>
-            <a:schemeClr val="bg1"/>
-          </a:solidFill>
-          <a:ln>
-            <a:solidFill>
-              <a:schemeClr val="bg1"/>
-            </a:solidFill>
-          </a:ln>
-        </p:spPr>
-        <p:style>
-          <a:lnRef idx="2">
-            <a:schemeClr val="accent1">
-              <a:shade val="15000"/>
-            </a:schemeClr>
-          </a:lnRef>
-          <a:fillRef idx="1">
-            <a:schemeClr val="accent1"/>
-          </a:fillRef>
-          <a:effectRef idx="0">
-            <a:schemeClr val="accent1"/>
-          </a:effectRef>
-          <a:fontRef idx="minor">
-            <a:schemeClr val="lt1"/>
-          </a:fontRef>
-        </p:style>
-        <p:txBody>
-          <a:bodyPr rtlCol="0" anchor="ctr"/>
-          <a:lstStyle/>
-          <a:p>
-            <a:pPr algn="ctr"/>
-            <a:endParaRPr lang="en-US"/>
-          </a:p>
-        </p:txBody>
-      </p:sp>
-      <p:grpSp>
-        <p:nvGrpSpPr>
-          <p:cNvPr id="14" name="Group 13">
-            <a:extLst>
-              <a:ext uri="{FF2B5EF4-FFF2-40B4-BE49-F238E27FC236}">
-                <a16:creationId xmlns:a16="http://schemas.microsoft.com/office/drawing/2014/main" id="{F4F98E04-8210-9705-8245-D01DE01C5F5C}"/>
-              </a:ext>
-            </a:extLst>
-          </p:cNvPr>
-          <p:cNvGrpSpPr/>
-          <p:nvPr/>
-        </p:nvGrpSpPr>
-        <p:grpSpPr>
-          <a:xfrm>
-            <a:off x="10061651" y="4875629"/>
-            <a:ext cx="4661894" cy="3964741"/>
-            <a:chOff x="10663139" y="4875629"/>
-            <a:chExt cx="4661894" cy="3964741"/>
-          </a:xfrm>
-        </p:grpSpPr>
-        <p:pic>
-          <p:nvPicPr>
-            <p:cNvPr id="8" name="Picture 7">
-              <a:extLst>
-                <a:ext uri="{FF2B5EF4-FFF2-40B4-BE49-F238E27FC236}">
-                  <a16:creationId xmlns:a16="http://schemas.microsoft.com/office/drawing/2014/main" id="{F59AB5FF-891B-4E21-EA12-F94BD59CF9EB}"/>
-                </a:ext>
-              </a:extLst>
-            </p:cNvPr>
-            <p:cNvPicPr>
-              <a:picLocks noChangeAspect="1"/>
-            </p:cNvPicPr>
-            <p:nvPr/>
-          </p:nvPicPr>
-          <p:blipFill>
-            <a:blip r:embed="rId3"/>
-            <a:stretch>
-              <a:fillRect/>
-            </a:stretch>
-          </p:blipFill>
-          <p:spPr>
-            <a:xfrm>
-              <a:off x="10722486" y="4875629"/>
-              <a:ext cx="4602547" cy="3964741"/>
-            </a:xfrm>
-            <a:prstGeom prst="rect">
-              <a:avLst/>
-            </a:prstGeom>
-          </p:spPr>
-        </p:pic>
-        <p:sp>
-          <p:nvSpPr>
-            <p:cNvPr id="9" name="Rectangle 8">
-              <a:extLst>
-                <a:ext uri="{FF2B5EF4-FFF2-40B4-BE49-F238E27FC236}">
-                  <a16:creationId xmlns:a16="http://schemas.microsoft.com/office/drawing/2014/main" id="{2AFB6A11-A365-EC21-3BAA-0BD65FA12A41}"/>
-                </a:ext>
-              </a:extLst>
-            </p:cNvPr>
-            <p:cNvSpPr/>
-            <p:nvPr/>
-          </p:nvSpPr>
-          <p:spPr>
-            <a:xfrm>
-              <a:off x="12463975" y="6921136"/>
-              <a:ext cx="126610" cy="145477"/>
-            </a:xfrm>
-            <a:prstGeom prst="rect">
-              <a:avLst/>
-            </a:prstGeom>
-            <a:solidFill>
-              <a:schemeClr val="bg1"/>
-            </a:solidFill>
-            <a:ln>
-              <a:solidFill>
-                <a:schemeClr val="bg1"/>
-              </a:solidFill>
-            </a:ln>
-          </p:spPr>
-          <p:style>
-            <a:lnRef idx="2">
-              <a:schemeClr val="accent1">
-                <a:shade val="15000"/>
-              </a:schemeClr>
-            </a:lnRef>
-            <a:fillRef idx="1">
-              <a:schemeClr val="accent1"/>
-            </a:fillRef>
-            <a:effectRef idx="0">
-              <a:schemeClr val="accent1"/>
-            </a:effectRef>
-            <a:fontRef idx="minor">
-              <a:schemeClr val="lt1"/>
-            </a:fontRef>
-          </p:style>
-          <p:txBody>
-            <a:bodyPr rtlCol="0" anchor="ctr"/>
-            <a:lstStyle/>
-            <a:p>
-              <a:pPr algn="ctr"/>
-              <a:endParaRPr lang="en-US"/>
-            </a:p>
-          </p:txBody>
-        </p:sp>
-        <p:sp>
-          <p:nvSpPr>
-            <p:cNvPr id="10" name="Rectangle 9">
-              <a:extLst>
-                <a:ext uri="{FF2B5EF4-FFF2-40B4-BE49-F238E27FC236}">
-                  <a16:creationId xmlns:a16="http://schemas.microsoft.com/office/drawing/2014/main" id="{698E48F4-DEA0-CA71-3978-912C30E5C73E}"/>
-                </a:ext>
-              </a:extLst>
-            </p:cNvPr>
-            <p:cNvSpPr/>
-            <p:nvPr/>
-          </p:nvSpPr>
-          <p:spPr>
-            <a:xfrm>
-              <a:off x="12799255" y="6775659"/>
-              <a:ext cx="126610" cy="236918"/>
-            </a:xfrm>
-            <a:prstGeom prst="rect">
-              <a:avLst/>
-            </a:prstGeom>
-            <a:solidFill>
-              <a:schemeClr val="bg1"/>
-            </a:solidFill>
-            <a:ln>
-              <a:solidFill>
-                <a:schemeClr val="bg1"/>
-              </a:solidFill>
-            </a:ln>
-          </p:spPr>
-          <p:style>
-            <a:lnRef idx="2">
-              <a:schemeClr val="accent1">
-                <a:shade val="15000"/>
-              </a:schemeClr>
-            </a:lnRef>
-            <a:fillRef idx="1">
-              <a:schemeClr val="accent1"/>
-            </a:fillRef>
-            <a:effectRef idx="0">
-              <a:schemeClr val="accent1"/>
-            </a:effectRef>
-            <a:fontRef idx="minor">
-              <a:schemeClr val="lt1"/>
-            </a:fontRef>
-          </p:style>
-          <p:txBody>
-            <a:bodyPr rtlCol="0" anchor="ctr"/>
-            <a:lstStyle/>
-            <a:p>
-              <a:pPr algn="ctr"/>
-              <a:endParaRPr lang="en-US"/>
-            </a:p>
-          </p:txBody>
-        </p:sp>
-        <p:sp>
-          <p:nvSpPr>
-            <p:cNvPr id="11" name="Rectangle 10">
-              <a:extLst>
-                <a:ext uri="{FF2B5EF4-FFF2-40B4-BE49-F238E27FC236}">
-                  <a16:creationId xmlns:a16="http://schemas.microsoft.com/office/drawing/2014/main" id="{4A442248-268D-F35B-A910-D4F3F3B22C59}"/>
-                </a:ext>
-              </a:extLst>
-            </p:cNvPr>
-            <p:cNvSpPr/>
-            <p:nvPr/>
-          </p:nvSpPr>
-          <p:spPr>
-            <a:xfrm>
-              <a:off x="10663139" y="6189617"/>
-              <a:ext cx="703555" cy="1463039"/>
-            </a:xfrm>
-            <a:prstGeom prst="rect">
-              <a:avLst/>
-            </a:prstGeom>
-            <a:solidFill>
-              <a:schemeClr val="bg1"/>
-            </a:solidFill>
-            <a:ln>
-              <a:solidFill>
-                <a:schemeClr val="bg1"/>
-              </a:solidFill>
-            </a:ln>
-          </p:spPr>
-          <p:style>
-            <a:lnRef idx="2">
-              <a:schemeClr val="accent1">
-                <a:shade val="15000"/>
-              </a:schemeClr>
-            </a:lnRef>
-            <a:fillRef idx="1">
-              <a:schemeClr val="accent1"/>
-            </a:fillRef>
-            <a:effectRef idx="0">
-              <a:schemeClr val="accent1"/>
-            </a:effectRef>
-            <a:fontRef idx="minor">
-              <a:schemeClr val="lt1"/>
-            </a:fontRef>
-          </p:style>
-          <p:txBody>
-            <a:bodyPr rtlCol="0" anchor="ctr"/>
-            <a:lstStyle/>
-            <a:p>
-              <a:pPr algn="ctr"/>
-              <a:endParaRPr lang="en-US"/>
-            </a:p>
-          </p:txBody>
-        </p:sp>
-        <p:sp>
-          <p:nvSpPr>
-            <p:cNvPr id="12" name="Rectangle 11">
-              <a:extLst>
-                <a:ext uri="{FF2B5EF4-FFF2-40B4-BE49-F238E27FC236}">
-                  <a16:creationId xmlns:a16="http://schemas.microsoft.com/office/drawing/2014/main" id="{6C17C551-B540-B4A1-9E35-6E83AECF34E8}"/>
-                </a:ext>
-              </a:extLst>
-            </p:cNvPr>
-            <p:cNvSpPr/>
-            <p:nvPr/>
-          </p:nvSpPr>
-          <p:spPr>
-            <a:xfrm>
-              <a:off x="12645242" y="6428656"/>
-              <a:ext cx="126610" cy="236918"/>
-            </a:xfrm>
-            <a:prstGeom prst="rect">
-              <a:avLst/>
-            </a:prstGeom>
-            <a:solidFill>
-              <a:schemeClr val="bg1"/>
-            </a:solidFill>
-            <a:ln>
-              <a:solidFill>
-                <a:schemeClr val="bg1"/>
-              </a:solidFill>
-            </a:ln>
-          </p:spPr>
-          <p:style>
-            <a:lnRef idx="2">
-              <a:schemeClr val="accent1">
-                <a:shade val="15000"/>
-              </a:schemeClr>
-            </a:lnRef>
-            <a:fillRef idx="1">
-              <a:schemeClr val="accent1"/>
-            </a:fillRef>
-            <a:effectRef idx="0">
-              <a:schemeClr val="accent1"/>
-            </a:effectRef>
-            <a:fontRef idx="minor">
-              <a:schemeClr val="lt1"/>
-            </a:fontRef>
-          </p:style>
-          <p:txBody>
-            <a:bodyPr rtlCol="0" anchor="ctr"/>
-            <a:lstStyle/>
-            <a:p>
-              <a:pPr algn="ctr"/>
-              <a:endParaRPr lang="en-US"/>
-            </a:p>
-          </p:txBody>
-        </p:sp>
-        <p:sp>
-          <p:nvSpPr>
-            <p:cNvPr id="13" name="Rectangle 12">
-              <a:extLst>
-                <a:ext uri="{FF2B5EF4-FFF2-40B4-BE49-F238E27FC236}">
-                  <a16:creationId xmlns:a16="http://schemas.microsoft.com/office/drawing/2014/main" id="{742F183D-FA95-9260-9E74-4EA3A9DFDFB4}"/>
-                </a:ext>
-              </a:extLst>
-            </p:cNvPr>
-            <p:cNvSpPr/>
-            <p:nvPr/>
-          </p:nvSpPr>
-          <p:spPr>
-            <a:xfrm>
-              <a:off x="10798404" y="4997188"/>
-              <a:ext cx="568290" cy="422099"/>
-            </a:xfrm>
-            <a:prstGeom prst="rect">
-              <a:avLst/>
-            </a:prstGeom>
-            <a:solidFill>
-              <a:schemeClr val="bg1"/>
-            </a:solidFill>
-            <a:ln>
-              <a:solidFill>
-                <a:schemeClr val="bg1"/>
-              </a:solidFill>
-            </a:ln>
-          </p:spPr>
-          <p:style>
-            <a:lnRef idx="2">
-              <a:schemeClr val="accent1">
-                <a:shade val="15000"/>
-              </a:schemeClr>
-            </a:lnRef>
-            <a:fillRef idx="1">
-              <a:schemeClr val="accent1"/>
-            </a:fillRef>
-            <a:effectRef idx="0">
-              <a:schemeClr val="accent1"/>
-            </a:effectRef>
-            <a:fontRef idx="minor">
-              <a:schemeClr val="lt1"/>
-            </a:fontRef>
-          </p:style>
-          <p:txBody>
-            <a:bodyPr rtlCol="0" anchor="ctr"/>
-            <a:lstStyle/>
-            <a:p>
-              <a:pPr algn="ctr"/>
-              <a:endParaRPr lang="en-US"/>
-            </a:p>
-          </p:txBody>
-        </p:sp>
-      </p:grpSp>
-      <p:sp>
-        <p:nvSpPr>
-          <p:cNvPr id="20" name="Rectangle 19">
-            <a:extLst>
-              <a:ext uri="{FF2B5EF4-FFF2-40B4-BE49-F238E27FC236}">
-                <a16:creationId xmlns:a16="http://schemas.microsoft.com/office/drawing/2014/main" id="{92AAF09E-7B0C-C997-735E-A095370E73E8}"/>
-              </a:ext>
-            </a:extLst>
-          </p:cNvPr>
-          <p:cNvSpPr/>
-          <p:nvPr/>
-        </p:nvSpPr>
-        <p:spPr>
-          <a:xfrm>
-            <a:off x="5803253" y="7556654"/>
-            <a:ext cx="445931" cy="407979"/>
-          </a:xfrm>
-          <a:prstGeom prst="rect">
-            <a:avLst/>
-          </a:prstGeom>
-          <a:solidFill>
-            <a:schemeClr val="bg1"/>
-          </a:solidFill>
-          <a:ln>
-            <a:solidFill>
-              <a:schemeClr val="bg1"/>
-            </a:solidFill>
-          </a:ln>
-        </p:spPr>
-        <p:style>
-          <a:lnRef idx="2">
-            <a:schemeClr val="accent1">
-              <a:shade val="15000"/>
-            </a:schemeClr>
-          </a:lnRef>
-          <a:fillRef idx="1">
-            <a:schemeClr val="accent1"/>
-          </a:fillRef>
-          <a:effectRef idx="0">
-            <a:schemeClr val="accent1"/>
-          </a:effectRef>
-          <a:fontRef idx="minor">
-            <a:schemeClr val="lt1"/>
-          </a:fontRef>
-        </p:style>
-        <p:txBody>
-          <a:bodyPr rtlCol="0" anchor="ctr"/>
-          <a:lstStyle/>
-          <a:p>
-            <a:pPr algn="ctr"/>
-            <a:endParaRPr lang="en-US"/>
-          </a:p>
-        </p:txBody>
-      </p:sp>
-      <p:sp>
-        <p:nvSpPr>
-          <p:cNvPr id="21" name="Rectangle 20">
-            <a:extLst>
-              <a:ext uri="{FF2B5EF4-FFF2-40B4-BE49-F238E27FC236}">
-                <a16:creationId xmlns:a16="http://schemas.microsoft.com/office/drawing/2014/main" id="{9EC31FFD-B025-90FF-0E57-B4C640B8FEA7}"/>
-              </a:ext>
-            </a:extLst>
-          </p:cNvPr>
-          <p:cNvSpPr/>
-          <p:nvPr/>
-        </p:nvSpPr>
-        <p:spPr>
-          <a:xfrm>
-            <a:off x="6955864" y="7880706"/>
-            <a:ext cx="372590" cy="479728"/>
-          </a:xfrm>
-          <a:prstGeom prst="rect">
-            <a:avLst/>
-          </a:prstGeom>
-          <a:solidFill>
-            <a:schemeClr val="bg1"/>
-          </a:solidFill>
-          <a:ln>
-            <a:solidFill>
-              <a:schemeClr val="bg1"/>
-            </a:solidFill>
-          </a:ln>
-        </p:spPr>
-        <p:style>
-          <a:lnRef idx="2">
-            <a:schemeClr val="accent1">
-              <a:shade val="15000"/>
-            </a:schemeClr>
-          </a:lnRef>
-          <a:fillRef idx="1">
-            <a:schemeClr val="accent1"/>
-          </a:fillRef>
-          <a:effectRef idx="0">
-            <a:schemeClr val="accent1"/>
-          </a:effectRef>
-          <a:fontRef idx="minor">
-            <a:schemeClr val="lt1"/>
-          </a:fontRef>
-        </p:style>
-        <p:txBody>
-          <a:bodyPr rtlCol="0" anchor="ctr"/>
-          <a:lstStyle/>
-          <a:p>
-            <a:pPr algn="ctr"/>
-            <a:endParaRPr lang="en-US"/>
-          </a:p>
-        </p:txBody>
-      </p:sp>
-      <p:sp>
-        <p:nvSpPr>
-          <p:cNvPr id="22" name="TextBox 21">
-            <a:extLst>
-              <a:ext uri="{FF2B5EF4-FFF2-40B4-BE49-F238E27FC236}">
-                <a16:creationId xmlns:a16="http://schemas.microsoft.com/office/drawing/2014/main" id="{C392419F-E7E3-7BCA-E289-2E7679A72970}"/>
-              </a:ext>
-            </a:extLst>
-          </p:cNvPr>
-          <p:cNvSpPr txBox="1"/>
-          <p:nvPr/>
-        </p:nvSpPr>
-        <p:spPr>
-          <a:xfrm>
-            <a:off x="901522" y="5191261"/>
-            <a:ext cx="2724807" cy="400110"/>
-          </a:xfrm>
-          <a:prstGeom prst="rect">
-            <a:avLst/>
-          </a:prstGeom>
-          <a:noFill/>
-        </p:spPr>
-        <p:txBody>
-          <a:bodyPr wrap="square" rtlCol="0">
-            <a:spAutoFit/>
-          </a:bodyPr>
-          <a:lstStyle/>
-          <a:p>
-            <a:r>
-              <a:rPr lang="en-US" sz="2000" dirty="0"/>
-              <a:t>Species divergence</a:t>
-            </a:r>
-          </a:p>
-        </p:txBody>
-      </p:sp>
-      <p:sp>
-        <p:nvSpPr>
-          <p:cNvPr id="23" name="TextBox 22">
-            <a:extLst>
-              <a:ext uri="{FF2B5EF4-FFF2-40B4-BE49-F238E27FC236}">
-                <a16:creationId xmlns:a16="http://schemas.microsoft.com/office/drawing/2014/main" id="{B1F4B850-602D-8E02-F60D-8B339654DFF5}"/>
-              </a:ext>
-            </a:extLst>
-          </p:cNvPr>
-          <p:cNvSpPr txBox="1"/>
-          <p:nvPr/>
-        </p:nvSpPr>
-        <p:spPr>
-          <a:xfrm>
-            <a:off x="2063676" y="4415092"/>
-            <a:ext cx="2724807" cy="400110"/>
-          </a:xfrm>
-          <a:prstGeom prst="rect">
-            <a:avLst/>
-          </a:prstGeom>
-          <a:noFill/>
-        </p:spPr>
-        <p:txBody>
-          <a:bodyPr wrap="square" rtlCol="0">
-            <a:spAutoFit/>
-          </a:bodyPr>
-          <a:lstStyle/>
-          <a:p>
-            <a:r>
-              <a:rPr lang="en-US" sz="2000" dirty="0"/>
-              <a:t>Gene divergence</a:t>
-            </a:r>
-          </a:p>
-        </p:txBody>
-      </p:sp>
-      <p:cxnSp>
-        <p:nvCxnSpPr>
-          <p:cNvPr id="15" name="Straight Arrow Connector 14">
-            <a:extLst>
-              <a:ext uri="{FF2B5EF4-FFF2-40B4-BE49-F238E27FC236}">
-                <a16:creationId xmlns:a16="http://schemas.microsoft.com/office/drawing/2014/main" id="{535D031D-F967-A7D9-CF2D-C6DCA08DFC01}"/>
-              </a:ext>
-            </a:extLst>
-          </p:cNvPr>
-          <p:cNvCxnSpPr>
-            <a:cxnSpLocks/>
-          </p:cNvCxnSpPr>
-          <p:nvPr/>
-        </p:nvCxnSpPr>
-        <p:spPr>
-          <a:xfrm flipH="1">
-            <a:off x="4145562" y="4610427"/>
-            <a:ext cx="681331" cy="0"/>
-          </a:xfrm>
-          <a:prstGeom prst="straightConnector1">
-            <a:avLst/>
-          </a:prstGeom>
-          <a:ln w="38100">
-            <a:solidFill>
-              <a:srgbClr val="C00000"/>
-            </a:solidFill>
-            <a:headEnd type="none" w="med" len="med"/>
-            <a:tailEnd type="arrow" w="med" len="med"/>
-          </a:ln>
-        </p:spPr>
-        <p:style>
-          <a:lnRef idx="1">
-            <a:schemeClr val="accent1"/>
-          </a:lnRef>
-          <a:fillRef idx="0">
-            <a:schemeClr val="accent1"/>
-          </a:fillRef>
-          <a:effectRef idx="0">
-            <a:schemeClr val="accent1"/>
-          </a:effectRef>
-          <a:fontRef idx="minor">
-            <a:schemeClr val="tx1"/>
-          </a:fontRef>
-        </p:style>
-      </p:cxnSp>
-      <p:sp>
-        <p:nvSpPr>
-          <p:cNvPr id="29" name="TextBox 28">
-            <a:extLst>
-              <a:ext uri="{FF2B5EF4-FFF2-40B4-BE49-F238E27FC236}">
-                <a16:creationId xmlns:a16="http://schemas.microsoft.com/office/drawing/2014/main" id="{9899E135-87D3-02B1-3971-418E7712BB2B}"/>
-              </a:ext>
-            </a:extLst>
-          </p:cNvPr>
-          <p:cNvSpPr txBox="1"/>
-          <p:nvPr/>
-        </p:nvSpPr>
-        <p:spPr>
-          <a:xfrm>
-            <a:off x="937874" y="6603121"/>
-            <a:ext cx="2251604" cy="707886"/>
-          </a:xfrm>
-          <a:prstGeom prst="rect">
-            <a:avLst/>
-          </a:prstGeom>
-          <a:noFill/>
-        </p:spPr>
-        <p:txBody>
-          <a:bodyPr wrap="square" rtlCol="0">
-            <a:spAutoFit/>
-          </a:bodyPr>
-          <a:lstStyle/>
-          <a:p>
-            <a:pPr algn="ctr"/>
-            <a:r>
-              <a:rPr lang="en-US" sz="2000" dirty="0"/>
-              <a:t>Incomplete lineage sorting</a:t>
-            </a:r>
-          </a:p>
-        </p:txBody>
-      </p:sp>
-      <p:sp>
-        <p:nvSpPr>
-          <p:cNvPr id="37" name="Rectangle 36">
-            <a:extLst>
-              <a:ext uri="{FF2B5EF4-FFF2-40B4-BE49-F238E27FC236}">
-                <a16:creationId xmlns:a16="http://schemas.microsoft.com/office/drawing/2014/main" id="{59061CEE-E5AA-10DF-8796-13768E5A7A2B}"/>
-              </a:ext>
-            </a:extLst>
-          </p:cNvPr>
-          <p:cNvSpPr/>
-          <p:nvPr/>
-        </p:nvSpPr>
-        <p:spPr>
-          <a:xfrm>
-            <a:off x="10257777" y="7598557"/>
-            <a:ext cx="499220" cy="479728"/>
-          </a:xfrm>
-          <a:prstGeom prst="rect">
-            <a:avLst/>
-          </a:prstGeom>
-          <a:solidFill>
-            <a:schemeClr val="bg1"/>
-          </a:solidFill>
-          <a:ln>
-            <a:solidFill>
-              <a:schemeClr val="bg1"/>
-            </a:solidFill>
-          </a:ln>
-        </p:spPr>
-        <p:style>
-          <a:lnRef idx="2">
-            <a:schemeClr val="accent1">
-              <a:shade val="15000"/>
-            </a:schemeClr>
-          </a:lnRef>
-          <a:fillRef idx="1">
-            <a:schemeClr val="accent1"/>
-          </a:fillRef>
-          <a:effectRef idx="0">
-            <a:schemeClr val="accent1"/>
-          </a:effectRef>
-          <a:fontRef idx="minor">
-            <a:schemeClr val="lt1"/>
-          </a:fontRef>
-        </p:style>
-        <p:txBody>
-          <a:bodyPr rtlCol="0" anchor="ctr"/>
-          <a:lstStyle/>
-          <a:p>
-            <a:pPr algn="ctr"/>
-            <a:endParaRPr lang="en-US"/>
-          </a:p>
-        </p:txBody>
-      </p:sp>
-      <p:sp>
-        <p:nvSpPr>
-          <p:cNvPr id="38" name="Rectangle 37">
-            <a:extLst>
-              <a:ext uri="{FF2B5EF4-FFF2-40B4-BE49-F238E27FC236}">
-                <a16:creationId xmlns:a16="http://schemas.microsoft.com/office/drawing/2014/main" id="{BC96E83F-81C5-341B-4C29-8C7E09084E1C}"/>
-              </a:ext>
-            </a:extLst>
-          </p:cNvPr>
-          <p:cNvSpPr/>
-          <p:nvPr/>
-        </p:nvSpPr>
-        <p:spPr>
-          <a:xfrm>
-            <a:off x="10756245" y="7113370"/>
-            <a:ext cx="325427" cy="242990"/>
-          </a:xfrm>
-          <a:prstGeom prst="rect">
-            <a:avLst/>
-          </a:prstGeom>
-          <a:solidFill>
-            <a:schemeClr val="bg1"/>
-          </a:solidFill>
-          <a:ln>
-            <a:solidFill>
-              <a:schemeClr val="bg1"/>
-            </a:solidFill>
-          </a:ln>
-        </p:spPr>
-        <p:style>
-          <a:lnRef idx="2">
-            <a:schemeClr val="accent1">
-              <a:shade val="15000"/>
-            </a:schemeClr>
-          </a:lnRef>
-          <a:fillRef idx="1">
-            <a:schemeClr val="accent1"/>
-          </a:fillRef>
-          <a:effectRef idx="0">
-            <a:schemeClr val="accent1"/>
-          </a:effectRef>
-          <a:fontRef idx="minor">
-            <a:schemeClr val="lt1"/>
-          </a:fontRef>
-        </p:style>
-        <p:txBody>
-          <a:bodyPr rtlCol="0" anchor="ctr"/>
-          <a:lstStyle/>
-          <a:p>
-            <a:pPr algn="ctr"/>
-            <a:endParaRPr lang="en-US"/>
-          </a:p>
-        </p:txBody>
-      </p:sp>
-      <p:sp>
-        <p:nvSpPr>
-          <p:cNvPr id="39" name="Rectangle 38">
-            <a:extLst>
-              <a:ext uri="{FF2B5EF4-FFF2-40B4-BE49-F238E27FC236}">
-                <a16:creationId xmlns:a16="http://schemas.microsoft.com/office/drawing/2014/main" id="{7BA4C78C-66A3-6BD1-3075-3C2BB4DA0301}"/>
-              </a:ext>
-            </a:extLst>
-          </p:cNvPr>
-          <p:cNvSpPr/>
-          <p:nvPr/>
-        </p:nvSpPr>
-        <p:spPr>
-          <a:xfrm>
-            <a:off x="11458998" y="7972928"/>
-            <a:ext cx="358767" cy="479728"/>
-          </a:xfrm>
-          <a:prstGeom prst="rect">
-            <a:avLst/>
-          </a:prstGeom>
-          <a:solidFill>
-            <a:schemeClr val="bg1"/>
-          </a:solidFill>
-          <a:ln>
-            <a:solidFill>
-              <a:schemeClr val="bg1"/>
-            </a:solidFill>
-          </a:ln>
-        </p:spPr>
-        <p:style>
-          <a:lnRef idx="2">
-            <a:schemeClr val="accent1">
-              <a:shade val="15000"/>
-            </a:schemeClr>
-          </a:lnRef>
-          <a:fillRef idx="1">
-            <a:schemeClr val="accent1"/>
-          </a:fillRef>
-          <a:effectRef idx="0">
-            <a:schemeClr val="accent1"/>
-          </a:effectRef>
-          <a:fontRef idx="minor">
-            <a:schemeClr val="lt1"/>
-          </a:fontRef>
-        </p:style>
-        <p:txBody>
-          <a:bodyPr rtlCol="0" anchor="ctr"/>
-          <a:lstStyle/>
-          <a:p>
-            <a:pPr algn="ctr"/>
-            <a:endParaRPr lang="en-US"/>
-          </a:p>
-        </p:txBody>
-      </p:sp>
-      <p:sp>
-        <p:nvSpPr>
-          <p:cNvPr id="40" name="Rectangle 39">
-            <a:extLst>
-              <a:ext uri="{FF2B5EF4-FFF2-40B4-BE49-F238E27FC236}">
-                <a16:creationId xmlns:a16="http://schemas.microsoft.com/office/drawing/2014/main" id="{3E4A1CA8-3E88-D5F0-F96A-76034D20F710}"/>
-              </a:ext>
-            </a:extLst>
-          </p:cNvPr>
-          <p:cNvSpPr/>
-          <p:nvPr/>
-        </p:nvSpPr>
-        <p:spPr>
-          <a:xfrm>
-            <a:off x="14338416" y="7484905"/>
-            <a:ext cx="358767" cy="479728"/>
-          </a:xfrm>
-          <a:prstGeom prst="rect">
-            <a:avLst/>
-          </a:prstGeom>
-          <a:solidFill>
-            <a:schemeClr val="bg1"/>
-          </a:solidFill>
-          <a:ln>
-            <a:solidFill>
-              <a:schemeClr val="bg1"/>
-            </a:solidFill>
-          </a:ln>
-        </p:spPr>
-        <p:style>
-          <a:lnRef idx="2">
-            <a:schemeClr val="accent1">
-              <a:shade val="15000"/>
-            </a:schemeClr>
-          </a:lnRef>
-          <a:fillRef idx="1">
-            <a:schemeClr val="accent1"/>
-          </a:fillRef>
-          <a:effectRef idx="0">
-            <a:schemeClr val="accent1"/>
-          </a:effectRef>
-          <a:fontRef idx="minor">
-            <a:schemeClr val="lt1"/>
-          </a:fontRef>
-        </p:style>
-        <p:txBody>
-          <a:bodyPr rtlCol="0" anchor="ctr"/>
-          <a:lstStyle/>
-          <a:p>
-            <a:pPr algn="ctr" rtl="0"/>
-            <a:endParaRPr lang="en-US"/>
-          </a:p>
-        </p:txBody>
-      </p:sp>
-      <p:sp>
-        <p:nvSpPr>
-          <p:cNvPr id="41" name="Rectangle 40">
-            <a:extLst>
-              <a:ext uri="{FF2B5EF4-FFF2-40B4-BE49-F238E27FC236}">
-                <a16:creationId xmlns:a16="http://schemas.microsoft.com/office/drawing/2014/main" id="{44E5251A-2CB9-B68B-E262-824DF688947E}"/>
-              </a:ext>
-            </a:extLst>
-          </p:cNvPr>
-          <p:cNvSpPr/>
-          <p:nvPr/>
-        </p:nvSpPr>
-        <p:spPr>
-          <a:xfrm>
-            <a:off x="12519766" y="7908002"/>
-            <a:ext cx="287371" cy="197579"/>
-          </a:xfrm>
-          <a:prstGeom prst="rect">
-            <a:avLst/>
-          </a:prstGeom>
-          <a:solidFill>
-            <a:schemeClr val="bg1"/>
-          </a:solidFill>
-          <a:ln>
-            <a:solidFill>
-              <a:schemeClr val="bg1"/>
-            </a:solidFill>
-          </a:ln>
-        </p:spPr>
-        <p:style>
-          <a:lnRef idx="2">
-            <a:schemeClr val="accent1">
-              <a:shade val="15000"/>
-            </a:schemeClr>
-          </a:lnRef>
-          <a:fillRef idx="1">
-            <a:schemeClr val="accent1"/>
-          </a:fillRef>
-          <a:effectRef idx="0">
-            <a:schemeClr val="accent1"/>
-          </a:effectRef>
-          <a:fontRef idx="minor">
-            <a:schemeClr val="lt1"/>
-          </a:fontRef>
-        </p:style>
-        <p:txBody>
-          <a:bodyPr rtlCol="0" anchor="ctr"/>
-          <a:lstStyle/>
-          <a:p>
-            <a:pPr algn="ctr" rtl="0"/>
-            <a:endParaRPr lang="en-US"/>
-          </a:p>
-        </p:txBody>
-      </p:sp>
-      <p:sp>
-        <p:nvSpPr>
-          <p:cNvPr id="34" name="Freeform 33">
-            <a:extLst>
-              <a:ext uri="{FF2B5EF4-FFF2-40B4-BE49-F238E27FC236}">
-                <a16:creationId xmlns:a16="http://schemas.microsoft.com/office/drawing/2014/main" id="{4F6ED085-E3E3-CA6E-135A-1DA2CF4BA841}"/>
-              </a:ext>
-            </a:extLst>
-          </p:cNvPr>
-          <p:cNvSpPr/>
-          <p:nvPr/>
-        </p:nvSpPr>
-        <p:spPr>
-          <a:xfrm>
-            <a:off x="4807557" y="5464400"/>
-            <a:ext cx="296471" cy="308265"/>
-          </a:xfrm>
-          <a:custGeom>
-            <a:avLst/>
-            <a:gdLst>
-              <a:gd name="connsiteX0" fmla="*/ 0 w 532660"/>
-              <a:gd name="connsiteY0" fmla="*/ 497149 h 497149"/>
-              <a:gd name="connsiteX1" fmla="*/ 88777 w 532660"/>
-              <a:gd name="connsiteY1" fmla="*/ 435006 h 497149"/>
-              <a:gd name="connsiteX2" fmla="*/ 106532 w 532660"/>
-              <a:gd name="connsiteY2" fmla="*/ 417250 h 497149"/>
-              <a:gd name="connsiteX3" fmla="*/ 142043 w 532660"/>
-              <a:gd name="connsiteY3" fmla="*/ 399495 h 497149"/>
-              <a:gd name="connsiteX4" fmla="*/ 186431 w 532660"/>
-              <a:gd name="connsiteY4" fmla="*/ 372862 h 497149"/>
-              <a:gd name="connsiteX5" fmla="*/ 221942 w 532660"/>
-              <a:gd name="connsiteY5" fmla="*/ 346229 h 497149"/>
-              <a:gd name="connsiteX6" fmla="*/ 248575 w 532660"/>
-              <a:gd name="connsiteY6" fmla="*/ 328473 h 497149"/>
-              <a:gd name="connsiteX7" fmla="*/ 266330 w 532660"/>
-              <a:gd name="connsiteY7" fmla="*/ 301840 h 497149"/>
-              <a:gd name="connsiteX8" fmla="*/ 284086 w 532660"/>
-              <a:gd name="connsiteY8" fmla="*/ 284085 h 497149"/>
-              <a:gd name="connsiteX9" fmla="*/ 292963 w 532660"/>
-              <a:gd name="connsiteY9" fmla="*/ 248574 h 497149"/>
-              <a:gd name="connsiteX10" fmla="*/ 310719 w 532660"/>
-              <a:gd name="connsiteY10" fmla="*/ 221941 h 497149"/>
-              <a:gd name="connsiteX11" fmla="*/ 328474 w 532660"/>
-              <a:gd name="connsiteY11" fmla="*/ 168675 h 497149"/>
-              <a:gd name="connsiteX12" fmla="*/ 355107 w 532660"/>
-              <a:gd name="connsiteY12" fmla="*/ 142042 h 497149"/>
-              <a:gd name="connsiteX13" fmla="*/ 372862 w 532660"/>
-              <a:gd name="connsiteY13" fmla="*/ 115409 h 497149"/>
-              <a:gd name="connsiteX14" fmla="*/ 399495 w 532660"/>
-              <a:gd name="connsiteY14" fmla="*/ 97654 h 497149"/>
-              <a:gd name="connsiteX15" fmla="*/ 443884 w 532660"/>
-              <a:gd name="connsiteY15" fmla="*/ 71021 h 497149"/>
-              <a:gd name="connsiteX16" fmla="*/ 497150 w 532660"/>
-              <a:gd name="connsiteY16" fmla="*/ 26633 h 497149"/>
-              <a:gd name="connsiteX17" fmla="*/ 532660 w 532660"/>
-              <a:gd name="connsiteY17" fmla="*/ 0 h 497149"/>
-            </a:gdLst>
-            <a:ahLst/>
-            <a:cxnLst>
-              <a:cxn ang="0">
-                <a:pos x="connsiteX0" y="connsiteY0"/>
-              </a:cxn>
-              <a:cxn ang="0">
-                <a:pos x="connsiteX1" y="connsiteY1"/>
-              </a:cxn>
-              <a:cxn ang="0">
-                <a:pos x="connsiteX2" y="connsiteY2"/>
-              </a:cxn>
-              <a:cxn ang="0">
-                <a:pos x="connsiteX3" y="connsiteY3"/>
-              </a:cxn>
-              <a:cxn ang="0">
-                <a:pos x="connsiteX4" y="connsiteY4"/>
-              </a:cxn>
-              <a:cxn ang="0">
-                <a:pos x="connsiteX5" y="connsiteY5"/>
-              </a:cxn>
-              <a:cxn ang="0">
-                <a:pos x="connsiteX6" y="connsiteY6"/>
-              </a:cxn>
-              <a:cxn ang="0">
-                <a:pos x="connsiteX7" y="connsiteY7"/>
-              </a:cxn>
-              <a:cxn ang="0">
-                <a:pos x="connsiteX8" y="connsiteY8"/>
-              </a:cxn>
-              <a:cxn ang="0">
-                <a:pos x="connsiteX9" y="connsiteY9"/>
-              </a:cxn>
-              <a:cxn ang="0">
-                <a:pos x="connsiteX10" y="connsiteY10"/>
-              </a:cxn>
-              <a:cxn ang="0">
-                <a:pos x="connsiteX11" y="connsiteY11"/>
-              </a:cxn>
-              <a:cxn ang="0">
-                <a:pos x="connsiteX12" y="connsiteY12"/>
-              </a:cxn>
-              <a:cxn ang="0">
-                <a:pos x="connsiteX13" y="connsiteY13"/>
-              </a:cxn>
-              <a:cxn ang="0">
-                <a:pos x="connsiteX14" y="connsiteY14"/>
-              </a:cxn>
-              <a:cxn ang="0">
-                <a:pos x="connsiteX15" y="connsiteY15"/>
-              </a:cxn>
-              <a:cxn ang="0">
-                <a:pos x="connsiteX16" y="connsiteY16"/>
-              </a:cxn>
-              <a:cxn ang="0">
-                <a:pos x="connsiteX17" y="connsiteY17"/>
-              </a:cxn>
-            </a:cxnLst>
-            <a:rect l="l" t="t" r="r" b="b"/>
-            <a:pathLst>
-              <a:path w="532660" h="497149">
-                <a:moveTo>
-                  <a:pt x="0" y="497149"/>
-                </a:moveTo>
-                <a:cubicBezTo>
-                  <a:pt x="29592" y="476435"/>
-                  <a:pt x="63236" y="460549"/>
-                  <a:pt x="88777" y="435006"/>
-                </a:cubicBezTo>
-                <a:cubicBezTo>
-                  <a:pt x="94695" y="429087"/>
-                  <a:pt x="99568" y="421893"/>
-                  <a:pt x="106532" y="417250"/>
-                </a:cubicBezTo>
-                <a:cubicBezTo>
-                  <a:pt x="117543" y="409909"/>
-                  <a:pt x="130206" y="405413"/>
-                  <a:pt x="142043" y="399495"/>
-                </a:cubicBezTo>
-                <a:cubicBezTo>
-                  <a:pt x="183593" y="357943"/>
-                  <a:pt x="132652" y="403592"/>
-                  <a:pt x="186431" y="372862"/>
-                </a:cubicBezTo>
-                <a:cubicBezTo>
-                  <a:pt x="199278" y="365521"/>
-                  <a:pt x="209902" y="354829"/>
-                  <a:pt x="221942" y="346229"/>
-                </a:cubicBezTo>
-                <a:cubicBezTo>
-                  <a:pt x="230624" y="340027"/>
-                  <a:pt x="239697" y="334392"/>
-                  <a:pt x="248575" y="328473"/>
-                </a:cubicBezTo>
-                <a:cubicBezTo>
-                  <a:pt x="254493" y="319595"/>
-                  <a:pt x="259665" y="310171"/>
-                  <a:pt x="266330" y="301840"/>
-                </a:cubicBezTo>
-                <a:cubicBezTo>
-                  <a:pt x="271559" y="295304"/>
-                  <a:pt x="280343" y="291571"/>
-                  <a:pt x="284086" y="284085"/>
-                </a:cubicBezTo>
-                <a:cubicBezTo>
-                  <a:pt x="289543" y="273172"/>
-                  <a:pt x="288157" y="259789"/>
-                  <a:pt x="292963" y="248574"/>
-                </a:cubicBezTo>
-                <a:cubicBezTo>
-                  <a:pt x="297166" y="238767"/>
-                  <a:pt x="304800" y="230819"/>
-                  <a:pt x="310719" y="221941"/>
-                </a:cubicBezTo>
-                <a:cubicBezTo>
-                  <a:pt x="316637" y="204186"/>
-                  <a:pt x="315240" y="181909"/>
-                  <a:pt x="328474" y="168675"/>
-                </a:cubicBezTo>
-                <a:cubicBezTo>
-                  <a:pt x="337352" y="159797"/>
-                  <a:pt x="347070" y="151687"/>
-                  <a:pt x="355107" y="142042"/>
-                </a:cubicBezTo>
-                <a:cubicBezTo>
-                  <a:pt x="361937" y="133845"/>
-                  <a:pt x="365317" y="122954"/>
-                  <a:pt x="372862" y="115409"/>
-                </a:cubicBezTo>
-                <a:cubicBezTo>
-                  <a:pt x="380407" y="107864"/>
-                  <a:pt x="391163" y="104319"/>
-                  <a:pt x="399495" y="97654"/>
-                </a:cubicBezTo>
-                <a:cubicBezTo>
-                  <a:pt x="434313" y="69800"/>
-                  <a:pt x="397633" y="86439"/>
-                  <a:pt x="443884" y="71021"/>
-                </a:cubicBezTo>
-                <a:cubicBezTo>
-                  <a:pt x="507157" y="7748"/>
-                  <a:pt x="435345" y="76078"/>
-                  <a:pt x="497150" y="26633"/>
-                </a:cubicBezTo>
-                <a:cubicBezTo>
-                  <a:pt x="534541" y="-3280"/>
-                  <a:pt x="495595" y="18532"/>
-                  <a:pt x="532660" y="0"/>
-                </a:cubicBezTo>
-              </a:path>
-            </a:pathLst>
-          </a:custGeom>
-          <a:noFill/>
-          <a:ln w="50800">
-            <a:solidFill>
-              <a:schemeClr val="accent2">
-                <a:lumMod val="75000"/>
-              </a:schemeClr>
-            </a:solidFill>
-          </a:ln>
-        </p:spPr>
-        <p:style>
-          <a:lnRef idx="2">
-            <a:schemeClr val="accent1">
-              <a:shade val="50000"/>
-            </a:schemeClr>
-          </a:lnRef>
-          <a:fillRef idx="1">
-            <a:schemeClr val="accent1"/>
-          </a:fillRef>
-          <a:effectRef idx="0">
-            <a:schemeClr val="accent1"/>
-          </a:effectRef>
-          <a:fontRef idx="minor">
-            <a:schemeClr val="lt1"/>
-          </a:fontRef>
-        </p:style>
-        <p:txBody>
-          <a:bodyPr rtlCol="0" anchor="ctr"/>
-          <a:lstStyle/>
-          <a:p>
-            <a:pPr algn="ctr"/>
-            <a:endParaRPr lang="en-US">
-              <a:solidFill>
-                <a:schemeClr val="tx1"/>
-              </a:solidFill>
-            </a:endParaRPr>
-          </a:p>
-        </p:txBody>
-      </p:sp>
-      <p:sp>
-        <p:nvSpPr>
-          <p:cNvPr id="47" name="Rectangle 46">
-            <a:extLst>
-              <a:ext uri="{FF2B5EF4-FFF2-40B4-BE49-F238E27FC236}">
-                <a16:creationId xmlns:a16="http://schemas.microsoft.com/office/drawing/2014/main" id="{4D15210D-4BCB-88E6-8BDE-DB44EDDC1039}"/>
-              </a:ext>
-            </a:extLst>
-          </p:cNvPr>
-          <p:cNvSpPr/>
-          <p:nvPr/>
-        </p:nvSpPr>
-        <p:spPr>
-          <a:xfrm>
-            <a:off x="3127109" y="5208236"/>
-            <a:ext cx="499220" cy="1324765"/>
-          </a:xfrm>
-          <a:prstGeom prst="rect">
-            <a:avLst/>
-          </a:prstGeom>
-          <a:solidFill>
-            <a:schemeClr val="bg1"/>
-          </a:solidFill>
-          <a:ln>
-            <a:solidFill>
-              <a:schemeClr val="bg1"/>
-            </a:solidFill>
-          </a:ln>
-        </p:spPr>
-        <p:style>
-          <a:lnRef idx="2">
-            <a:schemeClr val="accent1">
-              <a:shade val="15000"/>
-            </a:schemeClr>
-          </a:lnRef>
-          <a:fillRef idx="1">
-            <a:schemeClr val="accent1"/>
-          </a:fillRef>
-          <a:effectRef idx="0">
-            <a:schemeClr val="accent1"/>
-          </a:effectRef>
-          <a:fontRef idx="minor">
-            <a:schemeClr val="lt1"/>
-          </a:fontRef>
-        </p:style>
-        <p:txBody>
-          <a:bodyPr rtlCol="0" anchor="ctr"/>
-          <a:lstStyle/>
-          <a:p>
-            <a:pPr algn="ctr"/>
-            <a:endParaRPr lang="en-US"/>
-          </a:p>
-        </p:txBody>
-      </p:sp>
-      <p:cxnSp>
-        <p:nvCxnSpPr>
-          <p:cNvPr id="24" name="Straight Arrow Connector 23">
-            <a:extLst>
-              <a:ext uri="{FF2B5EF4-FFF2-40B4-BE49-F238E27FC236}">
-                <a16:creationId xmlns:a16="http://schemas.microsoft.com/office/drawing/2014/main" id="{E1A116D0-1E27-3FA1-EC10-5E96E023AD1F}"/>
-              </a:ext>
-            </a:extLst>
-          </p:cNvPr>
-          <p:cNvCxnSpPr>
-            <a:cxnSpLocks/>
-          </p:cNvCxnSpPr>
-          <p:nvPr/>
-        </p:nvCxnSpPr>
-        <p:spPr>
-          <a:xfrm flipH="1">
-            <a:off x="3159059" y="5391316"/>
-            <a:ext cx="681331" cy="0"/>
-          </a:xfrm>
-          <a:prstGeom prst="straightConnector1">
-            <a:avLst/>
-          </a:prstGeom>
-          <a:ln w="38100">
-            <a:solidFill>
-              <a:srgbClr val="C00000"/>
-            </a:solidFill>
-            <a:headEnd type="none" w="med" len="med"/>
-            <a:tailEnd type="arrow" w="med" len="med"/>
-          </a:ln>
-        </p:spPr>
-        <p:style>
-          <a:lnRef idx="1">
-            <a:schemeClr val="accent1"/>
-          </a:lnRef>
-          <a:fillRef idx="0">
-            <a:schemeClr val="accent1"/>
-          </a:fillRef>
-          <a:effectRef idx="0">
-            <a:schemeClr val="accent1"/>
-          </a:effectRef>
-          <a:fontRef idx="minor">
-            <a:schemeClr val="tx1"/>
-          </a:fontRef>
-        </p:style>
-      </p:cxnSp>
-      <p:cxnSp>
-        <p:nvCxnSpPr>
-          <p:cNvPr id="28" name="Curved Connector 27">
-            <a:extLst>
-              <a:ext uri="{FF2B5EF4-FFF2-40B4-BE49-F238E27FC236}">
-                <a16:creationId xmlns:a16="http://schemas.microsoft.com/office/drawing/2014/main" id="{53ECCFB4-C363-34FA-54E5-8777BC67D86D}"/>
-              </a:ext>
-            </a:extLst>
-          </p:cNvPr>
-          <p:cNvCxnSpPr>
-            <a:cxnSpLocks/>
-          </p:cNvCxnSpPr>
-          <p:nvPr/>
-        </p:nvCxnSpPr>
-        <p:spPr>
-          <a:xfrm flipV="1">
-            <a:off x="2762806" y="6209262"/>
-            <a:ext cx="1227825" cy="479728"/>
-          </a:xfrm>
-          <a:prstGeom prst="curvedConnector3">
-            <a:avLst>
-              <a:gd name="adj1" fmla="val 351"/>
-            </a:avLst>
-          </a:prstGeom>
-          <a:ln w="38100">
-            <a:solidFill>
-              <a:srgbClr val="C00000"/>
-            </a:solidFill>
-            <a:tailEnd type="triangle"/>
-          </a:ln>
-        </p:spPr>
-        <p:style>
-          <a:lnRef idx="2">
-            <a:schemeClr val="accent1"/>
-          </a:lnRef>
-          <a:fillRef idx="0">
-            <a:schemeClr val="accent1"/>
-          </a:fillRef>
-          <a:effectRef idx="1">
-            <a:schemeClr val="accent1"/>
-          </a:effectRef>
-          <a:fontRef idx="minor">
-            <a:schemeClr val="tx1"/>
-          </a:fontRef>
-        </p:style>
-      </p:cxnSp>
-      <p:pic>
-        <p:nvPicPr>
-          <p:cNvPr id="48" name="Picture 47" descr="A picture containing line, diagram, design&#10;&#10;Description automatically generated">
-            <a:extLst>
-              <a:ext uri="{FF2B5EF4-FFF2-40B4-BE49-F238E27FC236}">
-                <a16:creationId xmlns:a16="http://schemas.microsoft.com/office/drawing/2014/main" id="{4AB5AD0D-E12C-5016-3579-BE9889B6D053}"/>
-              </a:ext>
-            </a:extLst>
-          </p:cNvPr>
-          <p:cNvPicPr>
-            <a:picLocks noChangeAspect="1"/>
-          </p:cNvPicPr>
-          <p:nvPr/>
-        </p:nvPicPr>
-        <p:blipFill>
-          <a:blip r:embed="rId2">
-            <a:extLst>
-              <a:ext uri="{28A0092B-C50C-407E-A947-70E740481C1C}">
-                <a14:useLocalDpi xmlns:a14="http://schemas.microsoft.com/office/drawing/2010/main" val="0"/>
-              </a:ext>
-            </a:extLst>
-          </a:blip>
-          <a:srcRect t="36081" r="88428" b="40640"/>
-          <a:stretch/>
-        </p:blipFill>
-        <p:spPr>
-          <a:xfrm>
-            <a:off x="6473772" y="4467882"/>
-            <a:ext cx="444156" cy="940644"/>
-          </a:xfrm>
-          <a:prstGeom prst="rect">
-            <a:avLst/>
-          </a:prstGeom>
-        </p:spPr>
-      </p:pic>
-      <p:sp>
-        <p:nvSpPr>
-          <p:cNvPr id="49" name="TextBox 48">
-            <a:extLst>
-              <a:ext uri="{FF2B5EF4-FFF2-40B4-BE49-F238E27FC236}">
-                <a16:creationId xmlns:a16="http://schemas.microsoft.com/office/drawing/2014/main" id="{DE298F29-7159-557E-7FAD-B7A75B44BDAC}"/>
-              </a:ext>
-            </a:extLst>
-          </p:cNvPr>
-          <p:cNvSpPr txBox="1"/>
-          <p:nvPr/>
-        </p:nvSpPr>
-        <p:spPr>
-          <a:xfrm>
-            <a:off x="6782830" y="4759978"/>
-            <a:ext cx="2724807" cy="400110"/>
-          </a:xfrm>
-          <a:prstGeom prst="rect">
-            <a:avLst/>
-          </a:prstGeom>
-          <a:noFill/>
-        </p:spPr>
-        <p:txBody>
-          <a:bodyPr wrap="square" rtlCol="0">
-            <a:spAutoFit/>
-          </a:bodyPr>
-          <a:lstStyle/>
-          <a:p>
-            <a:r>
-              <a:rPr lang="en-US" sz="2000" dirty="0"/>
-              <a:t>GS gap</a:t>
-            </a:r>
-          </a:p>
-        </p:txBody>
-      </p:sp>
-      <p:cxnSp>
-        <p:nvCxnSpPr>
-          <p:cNvPr id="33" name="Straight Connector 32">
-            <a:extLst>
-              <a:ext uri="{FF2B5EF4-FFF2-40B4-BE49-F238E27FC236}">
-                <a16:creationId xmlns:a16="http://schemas.microsoft.com/office/drawing/2014/main" id="{EA9067A0-5AF5-58CB-771B-7C358EB886D9}"/>
-              </a:ext>
-            </a:extLst>
-          </p:cNvPr>
-          <p:cNvCxnSpPr>
-            <a:cxnSpLocks/>
-          </p:cNvCxnSpPr>
-          <p:nvPr/>
-        </p:nvCxnSpPr>
-        <p:spPr>
-          <a:xfrm>
-            <a:off x="4721220" y="4610896"/>
-            <a:ext cx="1862460" cy="0"/>
-          </a:xfrm>
-          <a:prstGeom prst="line">
-            <a:avLst/>
-          </a:prstGeom>
-          <a:ln w="19050">
-            <a:solidFill>
-              <a:srgbClr val="C00000"/>
-            </a:solidFill>
-            <a:prstDash val="sysDash"/>
-          </a:ln>
-        </p:spPr>
-        <p:style>
-          <a:lnRef idx="2">
-            <a:schemeClr val="accent1"/>
-          </a:lnRef>
-          <a:fillRef idx="0">
-            <a:schemeClr val="accent1"/>
-          </a:fillRef>
-          <a:effectRef idx="1">
-            <a:schemeClr val="accent1"/>
-          </a:effectRef>
-          <a:fontRef idx="minor">
-            <a:schemeClr val="tx1"/>
-          </a:fontRef>
-        </p:style>
-      </p:cxnSp>
-      <p:cxnSp>
-        <p:nvCxnSpPr>
-          <p:cNvPr id="31" name="Straight Connector 30">
-            <a:extLst>
-              <a:ext uri="{FF2B5EF4-FFF2-40B4-BE49-F238E27FC236}">
-                <a16:creationId xmlns:a16="http://schemas.microsoft.com/office/drawing/2014/main" id="{F8EC36C2-33F6-3529-8F86-B531852B6D9A}"/>
-              </a:ext>
-            </a:extLst>
-          </p:cNvPr>
-          <p:cNvCxnSpPr>
-            <a:cxnSpLocks/>
-          </p:cNvCxnSpPr>
-          <p:nvPr/>
-        </p:nvCxnSpPr>
-        <p:spPr>
-          <a:xfrm flipV="1">
-            <a:off x="3841129" y="5374336"/>
-            <a:ext cx="2742551" cy="30666"/>
-          </a:xfrm>
-          <a:prstGeom prst="line">
-            <a:avLst/>
-          </a:prstGeom>
-          <a:ln w="19050">
-            <a:solidFill>
-              <a:srgbClr val="C00000"/>
-            </a:solidFill>
-            <a:prstDash val="sysDash"/>
-          </a:ln>
-        </p:spPr>
-        <p:style>
-          <a:lnRef idx="2">
-            <a:schemeClr val="accent1"/>
-          </a:lnRef>
-          <a:fillRef idx="0">
-            <a:schemeClr val="accent1"/>
-          </a:fillRef>
-          <a:effectRef idx="1">
-            <a:schemeClr val="accent1"/>
-          </a:effectRef>
-          <a:fontRef idx="minor">
-            <a:schemeClr val="tx1"/>
-          </a:fontRef>
-        </p:style>
-      </p:cxnSp>
-      <mc:AlternateContent xmlns:mc="http://schemas.openxmlformats.org/markup-compatibility/2006" xmlns:a14="http://schemas.microsoft.com/office/drawing/2010/main">
-        <mc:Choice Requires="a14">
-          <p:sp>
-            <p:nvSpPr>
-              <p:cNvPr id="55" name="TextBox 54">
-                <a:extLst>
-                  <a:ext uri="{FF2B5EF4-FFF2-40B4-BE49-F238E27FC236}">
-                    <a16:creationId xmlns:a16="http://schemas.microsoft.com/office/drawing/2014/main" id="{A9DBD9E1-25A1-DAEB-5139-52EB721A9425}"/>
-                  </a:ext>
-                </a:extLst>
-              </p:cNvPr>
-              <p:cNvSpPr txBox="1"/>
-              <p:nvPr/>
-            </p:nvSpPr>
-            <p:spPr>
-              <a:xfrm>
-                <a:off x="3104890" y="7464610"/>
-                <a:ext cx="1120139" cy="400110"/>
-              </a:xfrm>
-              <a:prstGeom prst="rect">
-                <a:avLst/>
-              </a:prstGeom>
-              <a:noFill/>
-            </p:spPr>
-            <p:txBody>
-              <a:bodyPr wrap="square" rtlCol="0">
-                <a:spAutoFit/>
-              </a:bodyPr>
-              <a:lstStyle/>
-              <a:p>
-                <a:pPr/>
-                <a14:m>
-                  <m:oMathPara xmlns:m="http://schemas.openxmlformats.org/officeDocument/2006/math">
-                    <m:oMathParaPr>
-                      <m:jc m:val="centerGroup"/>
-                    </m:oMathParaPr>
-                    <m:oMath xmlns:m="http://schemas.openxmlformats.org/officeDocument/2006/math">
-                      <m:r>
-                        <a:rPr lang="en-US" sz="2000" i="1" smtClean="0">
-                          <a:latin typeface="Cambria Math" panose="02040503050406030204" pitchFamily="18" charset="0"/>
-                        </a:rPr>
-                        <m:t>𝐴</m:t>
-                      </m:r>
-                    </m:oMath>
-                  </m:oMathPara>
-                </a14:m>
-                <a:endParaRPr lang="en-US" dirty="0"/>
-              </a:p>
-            </p:txBody>
-          </p:sp>
-        </mc:Choice>
-        <mc:Fallback xmlns="">
-          <p:sp>
-            <p:nvSpPr>
-              <p:cNvPr id="55" name="TextBox 54">
-                <a:extLst>
-                  <a:ext uri="{FF2B5EF4-FFF2-40B4-BE49-F238E27FC236}">
-                    <a16:creationId xmlns:a16="http://schemas.microsoft.com/office/drawing/2014/main" id="{A9DBD9E1-25A1-DAEB-5139-52EB721A9425}"/>
-                  </a:ext>
-                </a:extLst>
-              </p:cNvPr>
-              <p:cNvSpPr txBox="1">
-                <a:spLocks noRot="1" noChangeAspect="1" noMove="1" noResize="1" noEditPoints="1" noAdjustHandles="1" noChangeArrowheads="1" noChangeShapeType="1" noTextEdit="1"/>
-              </p:cNvSpPr>
-              <p:nvPr/>
-            </p:nvSpPr>
-            <p:spPr>
-              <a:xfrm>
-                <a:off x="3104890" y="7464610"/>
-                <a:ext cx="1120139" cy="400110"/>
-              </a:xfrm>
-              <a:prstGeom prst="rect">
-                <a:avLst/>
-              </a:prstGeom>
-              <a:blipFill>
-                <a:blip r:embed="rId4"/>
-                <a:stretch>
-                  <a:fillRect/>
-                </a:stretch>
-              </a:blipFill>
-            </p:spPr>
-            <p:txBody>
-              <a:bodyPr/>
-              <a:lstStyle/>
-              <a:p>
-                <a:r>
-                  <a:rPr lang="en-US">
-                    <a:noFill/>
-                  </a:rPr>
-                  <a:t> </a:t>
-                </a:r>
-              </a:p>
-            </p:txBody>
-          </p:sp>
-        </mc:Fallback>
-      </mc:AlternateContent>
-      <mc:AlternateContent xmlns:mc="http://schemas.openxmlformats.org/markup-compatibility/2006" xmlns:a14="http://schemas.microsoft.com/office/drawing/2010/main">
-        <mc:Choice Requires="a14">
-          <p:sp>
-            <p:nvSpPr>
-              <p:cNvPr id="56" name="TextBox 55">
-                <a:extLst>
-                  <a:ext uri="{FF2B5EF4-FFF2-40B4-BE49-F238E27FC236}">
-                    <a16:creationId xmlns:a16="http://schemas.microsoft.com/office/drawing/2014/main" id="{FE2EBA49-E7B5-0BAE-F627-AD513C49AB77}"/>
-                  </a:ext>
-                </a:extLst>
-              </p:cNvPr>
-              <p:cNvSpPr txBox="1"/>
-              <p:nvPr/>
-            </p:nvSpPr>
-            <p:spPr>
-              <a:xfrm>
-                <a:off x="4614724" y="7505967"/>
-                <a:ext cx="1120139" cy="369332"/>
-              </a:xfrm>
-              <a:prstGeom prst="rect">
-                <a:avLst/>
-              </a:prstGeom>
-              <a:noFill/>
-            </p:spPr>
-            <p:txBody>
-              <a:bodyPr wrap="square" rtlCol="0">
-                <a:spAutoFit/>
-              </a:bodyPr>
-              <a:lstStyle/>
-              <a:p>
-                <a:pPr/>
-                <a14:m>
-                  <m:oMathPara xmlns:m="http://schemas.openxmlformats.org/officeDocument/2006/math">
-                    <m:oMathParaPr>
-                      <m:jc m:val="centerGroup"/>
-                    </m:oMathParaPr>
-                    <m:oMath xmlns:m="http://schemas.openxmlformats.org/officeDocument/2006/math">
-                      <m:r>
-                        <a:rPr lang="en-US" b="0" i="1" smtClean="0">
-                          <a:latin typeface="Cambria Math" panose="02040503050406030204" pitchFamily="18" charset="0"/>
-                        </a:rPr>
-                        <m:t>𝐵</m:t>
-                      </m:r>
-                    </m:oMath>
-                  </m:oMathPara>
-                </a14:m>
-                <a:endParaRPr lang="en-US" dirty="0"/>
-              </a:p>
-            </p:txBody>
-          </p:sp>
-        </mc:Choice>
-        <mc:Fallback xmlns="">
-          <p:sp>
-            <p:nvSpPr>
-              <p:cNvPr id="56" name="TextBox 55">
-                <a:extLst>
-                  <a:ext uri="{FF2B5EF4-FFF2-40B4-BE49-F238E27FC236}">
-                    <a16:creationId xmlns:a16="http://schemas.microsoft.com/office/drawing/2014/main" id="{FE2EBA49-E7B5-0BAE-F627-AD513C49AB77}"/>
-                  </a:ext>
-                </a:extLst>
-              </p:cNvPr>
-              <p:cNvSpPr txBox="1">
-                <a:spLocks noRot="1" noChangeAspect="1" noMove="1" noResize="1" noEditPoints="1" noAdjustHandles="1" noChangeArrowheads="1" noChangeShapeType="1" noTextEdit="1"/>
-              </p:cNvSpPr>
-              <p:nvPr/>
-            </p:nvSpPr>
-            <p:spPr>
-              <a:xfrm>
-                <a:off x="4614724" y="7505967"/>
-                <a:ext cx="1120139" cy="369332"/>
-              </a:xfrm>
-              <a:prstGeom prst="rect">
-                <a:avLst/>
-              </a:prstGeom>
-              <a:blipFill>
-                <a:blip r:embed="rId5"/>
-                <a:stretch>
-                  <a:fillRect/>
-                </a:stretch>
-              </a:blipFill>
-            </p:spPr>
-            <p:txBody>
-              <a:bodyPr/>
-              <a:lstStyle/>
-              <a:p>
-                <a:r>
-                  <a:rPr lang="en-US">
-                    <a:noFill/>
-                  </a:rPr>
-                  <a:t> </a:t>
-                </a:r>
-              </a:p>
-            </p:txBody>
-          </p:sp>
-        </mc:Fallback>
-      </mc:AlternateContent>
-      <mc:AlternateContent xmlns:mc="http://schemas.openxmlformats.org/markup-compatibility/2006" xmlns:a14="http://schemas.microsoft.com/office/drawing/2010/main">
-        <mc:Choice Requires="a14">
-          <p:sp>
-            <p:nvSpPr>
-              <p:cNvPr id="57" name="TextBox 56">
-                <a:extLst>
-                  <a:ext uri="{FF2B5EF4-FFF2-40B4-BE49-F238E27FC236}">
-                    <a16:creationId xmlns:a16="http://schemas.microsoft.com/office/drawing/2014/main" id="{EF151774-A453-BED4-CDC6-18AF160308C1}"/>
-                  </a:ext>
-                </a:extLst>
-              </p:cNvPr>
-              <p:cNvSpPr txBox="1"/>
-              <p:nvPr/>
-            </p:nvSpPr>
-            <p:spPr>
-              <a:xfrm>
-                <a:off x="5584144" y="7478107"/>
-                <a:ext cx="1120139" cy="369332"/>
-              </a:xfrm>
-              <a:prstGeom prst="rect">
-                <a:avLst/>
-              </a:prstGeom>
-              <a:noFill/>
-            </p:spPr>
-            <p:txBody>
-              <a:bodyPr wrap="square" rtlCol="0">
-                <a:spAutoFit/>
-              </a:bodyPr>
-              <a:lstStyle/>
-              <a:p>
-                <a:pPr/>
-                <a14:m>
-                  <m:oMathPara xmlns:m="http://schemas.openxmlformats.org/officeDocument/2006/math">
-                    <m:oMathParaPr>
-                      <m:jc m:val="centerGroup"/>
-                    </m:oMathParaPr>
-                    <m:oMath xmlns:m="http://schemas.openxmlformats.org/officeDocument/2006/math">
-                      <m:r>
-                        <a:rPr lang="en-US" b="0" i="1" smtClean="0">
-                          <a:latin typeface="Cambria Math" panose="02040503050406030204" pitchFamily="18" charset="0"/>
-                        </a:rPr>
-                        <m:t>𝐶</m:t>
-                      </m:r>
-                    </m:oMath>
-                  </m:oMathPara>
-                </a14:m>
-                <a:endParaRPr lang="en-US" dirty="0"/>
-              </a:p>
-            </p:txBody>
-          </p:sp>
-        </mc:Choice>
-        <mc:Fallback xmlns="">
-          <p:sp>
-            <p:nvSpPr>
-              <p:cNvPr id="57" name="TextBox 56">
-                <a:extLst>
-                  <a:ext uri="{FF2B5EF4-FFF2-40B4-BE49-F238E27FC236}">
-                    <a16:creationId xmlns:a16="http://schemas.microsoft.com/office/drawing/2014/main" id="{EF151774-A453-BED4-CDC6-18AF160308C1}"/>
-                  </a:ext>
-                </a:extLst>
-              </p:cNvPr>
-              <p:cNvSpPr txBox="1">
-                <a:spLocks noRot="1" noChangeAspect="1" noMove="1" noResize="1" noEditPoints="1" noAdjustHandles="1" noChangeArrowheads="1" noChangeShapeType="1" noTextEdit="1"/>
-              </p:cNvSpPr>
-              <p:nvPr/>
-            </p:nvSpPr>
-            <p:spPr>
-              <a:xfrm>
-                <a:off x="5584144" y="7478107"/>
-                <a:ext cx="1120139" cy="369332"/>
-              </a:xfrm>
-              <a:prstGeom prst="rect">
-                <a:avLst/>
-              </a:prstGeom>
-              <a:blipFill>
-                <a:blip r:embed="rId6"/>
-                <a:stretch>
-                  <a:fillRect/>
-                </a:stretch>
-              </a:blipFill>
-            </p:spPr>
-            <p:txBody>
-              <a:bodyPr/>
-              <a:lstStyle/>
-              <a:p>
-                <a:r>
-                  <a:rPr lang="en-US">
-                    <a:noFill/>
-                  </a:rPr>
-                  <a:t> </a:t>
-                </a:r>
-              </a:p>
-            </p:txBody>
-          </p:sp>
-        </mc:Fallback>
-      </mc:AlternateContent>
-      <mc:AlternateContent xmlns:mc="http://schemas.openxmlformats.org/markup-compatibility/2006" xmlns:a14="http://schemas.microsoft.com/office/drawing/2010/main">
-        <mc:Choice Requires="a14">
-          <p:sp>
-            <p:nvSpPr>
-              <p:cNvPr id="58" name="TextBox 57">
-                <a:extLst>
-                  <a:ext uri="{FF2B5EF4-FFF2-40B4-BE49-F238E27FC236}">
-                    <a16:creationId xmlns:a16="http://schemas.microsoft.com/office/drawing/2014/main" id="{4A0B7C25-A3C2-CB15-81E8-5775364F6217}"/>
-                  </a:ext>
-                </a:extLst>
-              </p:cNvPr>
-              <p:cNvSpPr txBox="1"/>
-              <p:nvPr/>
-            </p:nvSpPr>
-            <p:spPr>
-              <a:xfrm>
-                <a:off x="6385963" y="7484417"/>
-                <a:ext cx="1120139" cy="369332"/>
-              </a:xfrm>
-              <a:prstGeom prst="rect">
-                <a:avLst/>
-              </a:prstGeom>
-              <a:noFill/>
-            </p:spPr>
-            <p:txBody>
-              <a:bodyPr wrap="square" rtlCol="0">
-                <a:spAutoFit/>
-              </a:bodyPr>
-              <a:lstStyle/>
-              <a:p>
-                <a:pPr/>
-                <a14:m>
-                  <m:oMathPara xmlns:m="http://schemas.openxmlformats.org/officeDocument/2006/math">
-                    <m:oMathParaPr>
-                      <m:jc m:val="centerGroup"/>
-                    </m:oMathParaPr>
-                    <m:oMath xmlns:m="http://schemas.openxmlformats.org/officeDocument/2006/math">
-                      <m:r>
-                        <a:rPr lang="en-US" b="0" i="1" smtClean="0">
-                          <a:latin typeface="Cambria Math" panose="02040503050406030204" pitchFamily="18" charset="0"/>
-                        </a:rPr>
-                        <m:t>𝐷</m:t>
-                      </m:r>
-                    </m:oMath>
-                  </m:oMathPara>
-                </a14:m>
-                <a:endParaRPr lang="en-US" dirty="0"/>
-              </a:p>
-            </p:txBody>
-          </p:sp>
-        </mc:Choice>
-        <mc:Fallback xmlns="">
-          <p:sp>
-            <p:nvSpPr>
-              <p:cNvPr id="58" name="TextBox 57">
-                <a:extLst>
-                  <a:ext uri="{FF2B5EF4-FFF2-40B4-BE49-F238E27FC236}">
-                    <a16:creationId xmlns:a16="http://schemas.microsoft.com/office/drawing/2014/main" id="{4A0B7C25-A3C2-CB15-81E8-5775364F6217}"/>
-                  </a:ext>
-                </a:extLst>
-              </p:cNvPr>
-              <p:cNvSpPr txBox="1">
-                <a:spLocks noRot="1" noChangeAspect="1" noMove="1" noResize="1" noEditPoints="1" noAdjustHandles="1" noChangeArrowheads="1" noChangeShapeType="1" noTextEdit="1"/>
-              </p:cNvSpPr>
-              <p:nvPr/>
-            </p:nvSpPr>
-            <p:spPr>
-              <a:xfrm>
-                <a:off x="6385963" y="7484417"/>
-                <a:ext cx="1120139" cy="369332"/>
-              </a:xfrm>
-              <a:prstGeom prst="rect">
-                <a:avLst/>
-              </a:prstGeom>
-              <a:blipFill>
-                <a:blip r:embed="rId7"/>
-                <a:stretch>
-                  <a:fillRect/>
-                </a:stretch>
-              </a:blipFill>
-            </p:spPr>
-            <p:txBody>
-              <a:bodyPr/>
-              <a:lstStyle/>
-              <a:p>
-                <a:r>
-                  <a:rPr lang="en-US">
-                    <a:noFill/>
-                  </a:rPr>
-                  <a:t> </a:t>
-                </a:r>
-              </a:p>
-            </p:txBody>
-          </p:sp>
-        </mc:Fallback>
-      </mc:AlternateContent>
-    </p:spTree>
-    <p:extLst>
-      <p:ext uri="{BB962C8B-B14F-4D97-AF65-F5344CB8AC3E}">
-        <p14:creationId xmlns:p14="http://schemas.microsoft.com/office/powerpoint/2010/main" val="72096799"/>
       </p:ext>
     </p:extLst>
   </p:cSld>
